--- a/Docs/decks/RESIDUUM_Final_EN.pptx
+++ b/Docs/decks/RESIDUUM_Final_EN.pptx
@@ -848,7 +848,7 @@
           <a:p>
             <a:r>
               <a:rPr lang="en-US" dirty="0"/>
-              <a:t>Ten seconds. Don't linger — say the title and the premise, then advance.</a:t>
+              <a:t>Ten seconds. Do not stop here. Say the name and the one-line idea, then move on.</a:t>
             </a:r>
             <a:endParaRPr lang="en-US" dirty="0"/>
           </a:p>
@@ -936,7 +936,7 @@
           <a:p>
             <a:r>
               <a:rPr lang="en-US" dirty="0"/>
-              <a:t>Eight RoomVolumes in the scene, seven of them ghost-room candidates. The cheapest thing about a horror game: you don't have to build what nobody can see.</a:t>
+              <a:t>Eight room volumes in the scene, seven of them can be the ghost room. The cheapest part of a horror game: you do not have to build what nobody can see.</a:t>
             </a:r>
             <a:endParaRPr lang="en-US" dirty="0"/>
           </a:p>
@@ -1024,7 +1024,7 @@
           <a:p>
             <a:r>
               <a:rPr lang="en-US" dirty="0"/>
-              <a:t>The payoff: any two modules can be written simultaneously by two sessions that know nothing about each other, and it will still compile.</a:t>
+              <a:t>Why it matters: two parts of the game can be written at the same time by people who never talk to each other, and it still builds.</a:t>
             </a:r>
             <a:endParaRPr lang="en-US" dirty="0"/>
           </a:p>
@@ -1112,7 +1112,7 @@
           <a:p>
             <a:r>
               <a:rPr lang="en-US" dirty="0"/>
-              <a:t>This is the differentiator. Other teams hand in a game. We hand in a game plus a production line that transfers to the next project.</a:t>
+              <a:t>This is what makes us different. Other teams hand in a game. We hand in a game and a way of working we can use again.</a:t>
             </a:r>
             <a:endParaRPr lang="en-US" dirty="0"/>
           </a:p>
@@ -1200,7 +1200,7 @@
           <a:p>
             <a:r>
               <a:rPr lang="en-US" dirty="0"/>
-              <a:t>If someone asks 'if the AI wrote it, is it yours?', the answer lives on this slide and the previous one.</a:t>
+              <a:t>If someone asks whether the work is really ours, the answer is on this slide and the one before it.</a:t>
             </a:r>
             <a:endParaRPr lang="en-US" dirty="0"/>
           </a:p>
@@ -1288,7 +1288,7 @@
           <a:p>
             <a:r>
               <a:rPr lang="en-US" dirty="0"/>
-              <a:t>Do not read all six. Say 59 task specs and 16,467 lines, and let them read the rest.</a:t>
+              <a:t>Do not read all six out loud. Say 59 task specs and 16,467 lines. Let people read the rest.</a:t>
             </a:r>
             <a:endParaRPr lang="en-US" dirty="0"/>
           </a:p>
@@ -1376,7 +1376,7 @@
           <a:p>
             <a:r>
               <a:rPr lang="en-US" dirty="0"/>
-              <a:t>In a one-week project, being able to state your abort conditions is worth ten times being able to state your goals.</a:t>
+              <a:t>In a one-week project, saying when you would give up on something is worth more than saying what you want to build.</a:t>
             </a:r>
             <a:endParaRPr lang="en-US" dirty="0"/>
           </a:p>
@@ -1464,7 +1464,7 @@
           <a:p>
             <a:r>
               <a:rPr lang="en-US" dirty="0"/>
-              <a:t>This slide exists purely to buy credibility. Pause after 'jumping' — that one is the most counter-intuitive.</a:t>
+              <a:t>This slide is here to build trust. Stop for a second after 'jumping'. People never expect that one.</a:t>
             </a:r>
             <a:endParaRPr lang="en-US" dirty="0"/>
           </a:p>
@@ -1552,7 +1552,7 @@
           <a:p>
             <a:r>
               <a:rPr lang="en-US" dirty="0"/>
-              <a:t>Leave this slide up while you switch to Unity. During the demo, narrate what is happening, never the mechanics — those are already explained.</a:t>
+              <a:t>Leave this slide up while you switch to Unity. While you play, only say what is happening. Do not explain the rules again.</a:t>
             </a:r>
             <a:endParaRPr lang="en-US" dirty="0"/>
           </a:p>
@@ -1640,7 +1640,7 @@
           <a:p>
             <a:r>
               <a:rPr lang="en-US" dirty="0"/>
-              <a:t>Say 'thank you' and stop. Do not explain anything after it. Let the last line hang and wait for questions.</a:t>
+              <a:t>Say thank you and stop talking. Do not add anything after it. Wait for questions.</a:t>
             </a:r>
             <a:endParaRPr lang="en-US" dirty="0"/>
           </a:p>
@@ -1728,7 +1728,7 @@
           <a:p>
             <a:r>
               <a:rPr lang="en-US" dirty="0"/>
-              <a:t>This slide is the what. The four numbers are the most memorable thing in the deck. Say them one at a time, with a beat between.</a:t>
+              <a:t>The four numbers are the easiest thing to remember. Say them one at a time and stop between each one.</a:t>
             </a:r>
             <a:endParaRPr lang="en-US" dirty="0"/>
           </a:p>
@@ -1816,7 +1816,7 @@
           <a:p>
             <a:r>
               <a:rPr lang="en-US" dirty="0"/>
-              <a:t>This slide buys credibility. We didn't cut because we ran out of time — we cut because we worked out what mattered.</a:t>
+              <a:t>The point of this slide: we did not make it small because we ran out of time. We made it small on purpose.</a:t>
             </a:r>
             <a:endParaRPr lang="en-US" dirty="0"/>
           </a:p>
@@ -1904,7 +1904,7 @@
           <a:p>
             <a:r>
               <a:rPr lang="en-US" dirty="0"/>
-              <a:t>If there is a whiteboard, draw this instead of showing it — three rows, three columns, one checkmark at a time. Watching you build it lands far harder. Beat before advancing.</a:t>
+              <a:t>If there is a whiteboard, draw this instead of showing it. Three rows, three columns, one tick at a time. People trust something they watch you build. Stop for a second before you move on.</a:t>
             </a:r>
             <a:endParaRPr lang="en-US" dirty="0"/>
           </a:p>
@@ -1992,7 +1992,7 @@
           <a:p>
             <a:r>
               <a:rPr lang="en-US" dirty="0"/>
-              <a:t>Stop dead after 'No luck.' Let it sit for two full seconds before you advance.</a:t>
+              <a:t>Stop after 'Just logic.' Count two seconds before you move on. Do not fill the silence.</a:t>
             </a:r>
             <a:endParaRPr lang="en-US" dirty="0"/>
           </a:p>
@@ -2080,7 +2080,7 @@
           <a:p>
             <a:r>
               <a:rPr lang="en-US" dirty="0"/>
-              <a:t>Deliver the line 'every extra piece of evidence costs you' slowly. That is the thesis of the whole design.</a:t>
+              <a:t>Say 'every extra clue costs you' slowly. That one line is the whole design.</a:t>
             </a:r>
             <a:endParaRPr lang="en-US" dirty="0"/>
           </a:p>
@@ -2168,7 +2168,7 @@
           <a:p>
             <a:r>
               <a:rPr lang="en-US" dirty="0"/>
-              <a:t>This slide is about feel, not features. All six numbers were re-benchmarked on day seven.</a:t>
+              <a:t>This slide is about how the game feels, not what it has. We re-tested all six numbers on day seven.</a:t>
             </a:r>
             <a:endParaRPr lang="en-US" dirty="0"/>
           </a:p>
@@ -2256,7 +2256,7 @@
           <a:p>
             <a:r>
               <a:rPr lang="en-US" dirty="0"/>
-              <a:t>Track, search, wait — three behaviour patterns that do not overlap. That is the answer to 'why these three items'.</a:t>
+              <a:t>Follow, search, wait. Three different things to do. That is why these three tools and not others.</a:t>
             </a:r>
             <a:endParaRPr lang="en-US" dirty="0"/>
           </a:p>
@@ -2344,7 +2344,7 @@
           <a:p>
             <a:r>
               <a:rPr lang="en-US" dirty="0"/>
-              <a:t>If asked 'aren't three ghosts too few', answer with this slide: four kinds of evidence would support six ghosts. We simply chose not to this week.</a:t>
+              <a:t>If someone says three ghosts is too few, use this slide. Four kinds of clue would give six ghosts. We just chose not to do it this week.</a:t>
             </a:r>
             <a:endParaRPr lang="en-US" dirty="0"/>
           </a:p>
@@ -2781,7 +2781,7 @@
               <a:buNone/>
             </a:pPr>
             <a:r>
-              <a:rPr lang="en-US" sz="2100" dirty="0">
+              <a:rPr lang="en-US" sz="1700" dirty="0">
                 <a:solidFill>
                   <a:srgbClr val="8D9AAD"/>
                 </a:solidFill>
@@ -2789,9 +2789,9 @@
                 <a:ea typeface="Calibri" pitchFamily="34" charset="-122"/>
                 <a:cs typeface="Calibri" pitchFamily="34" charset="-120"/>
               </a:rPr>
-              <a:t>A first-person horror investigation game</a:t>
-            </a:r>
-            <a:endParaRPr lang="en-US" sz="2100" dirty="0"/>
+              <a:t>A first-person horror game about what is in the house</a:t>
+            </a:r>
+            <a:endParaRPr lang="en-US" sz="1700" dirty="0"/>
           </a:p>
         </p:txBody>
       </p:sp>
@@ -2828,7 +2828,7 @@
                 <a:ea typeface="Calibri" pitchFamily="34" charset="-122"/>
                 <a:cs typeface="Calibri" pitchFamily="34" charset="-120"/>
               </a:rPr>
-              <a:t>You don't know what it is. That is the entire game.</a:t>
+              <a:t>You don't know what it is. That is the whole game.</a:t>
             </a:r>
             <a:endParaRPr lang="en-US" sz="1700" dirty="0"/>
           </a:p>
@@ -2867,7 +2867,7 @@
                 <a:ea typeface="Courier New" pitchFamily="34" charset="-122"/>
                 <a:cs typeface="Courier New" pitchFamily="34" charset="-120"/>
               </a:rPr>
-              <a:t>Unity 6000.5.8f1   ·   URP 17.5   ·   Single-player   ·   Vertical slice</a:t>
+              <a:t>Unity 6   ·   Single player   ·   A playable build made in 8 days</a:t>
             </a:r>
             <a:endParaRPr lang="en-US" sz="1150" dirty="0"/>
           </a:p>
@@ -2906,7 +2906,7 @@
                 <a:ea typeface="Courier New" pitchFamily="34" charset="-122"/>
                 <a:cs typeface="Courier New" pitchFamily="34" charset="-120"/>
               </a:rPr>
-              <a:t>Lead designer: Henry   ·   Final presentation   ·   August 2026</a:t>
+              <a:t>Made by 2 students   ·   Our first 3D game   ·   August 2026</a:t>
             </a:r>
             <a:endParaRPr lang="en-US" sz="1150" dirty="0"/>
           </a:p>
@@ -3360,7 +3360,7 @@
                 <a:ea typeface="Cambria" pitchFamily="34" charset="-122"/>
                 <a:cs typeface="Cambria" pitchFamily="34" charset="-120"/>
               </a:rPr>
-              <a:t>One apartment, eight zones</a:t>
+              <a:t>One apartment, eight areas</a:t>
             </a:r>
             <a:endParaRPr lang="en-US" sz="3400" dirty="0"/>
           </a:p>
@@ -3399,7 +3399,7 @@
                 <a:ea typeface="Calibri" pitchFamily="34" charset="-122"/>
                 <a:cs typeface="Calibri" pitchFamily="34" charset="-120"/>
               </a:rPr>
-              <a:t>One polished map beats three grey-boxed ones</a:t>
+              <a:t>One good map beats three empty ones</a:t>
             </a:r>
             <a:endParaRPr lang="en-US" sz="1450" dirty="0"/>
           </a:p>
@@ -4278,7 +4278,7 @@
                 <a:ea typeface="Calibri" pitchFamily="34" charset="-122"/>
                 <a:cs typeface="Calibri" pitchFamily="34" charset="-120"/>
               </a:rPr>
-              <a:t>Seven rooms are ghost-room candidates — one is drawn at random each run. The lobby is the safe zone.</a:t>
+              <a:t>Seven rooms can be the ghost room. The game picks one at random each time. The lobby is safe.</a:t>
             </a:r>
             <a:endParaRPr lang="en-US" sz="1200" dirty="0"/>
           </a:p>
@@ -4342,7 +4342,7 @@
                 <a:ea typeface="Calibri" pitchFamily="34" charset="-122"/>
                 <a:cs typeface="Calibri" pitchFamily="34" charset="-120"/>
               </a:rPr>
-              <a:t>Cold blue moonlight is the only ambient</a:t>
+              <a:t>Cold blue moonlight is the only room light</a:t>
             </a:r>
             <a:endParaRPr lang="en-US" sz="1400" dirty="0"/>
           </a:p>
@@ -4381,7 +4381,7 @@
                 <a:ea typeface="Calibri" pitchFamily="34" charset="-122"/>
                 <a:cs typeface="Calibri" pitchFamily="34" charset="-120"/>
               </a:rPr>
-              <a:t>A directional light through the windows. The interior is almost black.</a:t>
+              <a:t>It comes in through the windows. Inside the flat it is almost black.</a:t>
             </a:r>
             <a:endParaRPr lang="en-US" sz="1150" dirty="0"/>
           </a:p>
@@ -4445,7 +4445,7 @@
                 <a:ea typeface="Calibri" pitchFamily="34" charset="-122"/>
                 <a:cs typeface="Calibri" pitchFamily="34" charset="-120"/>
               </a:rPr>
-              <a:t>Your flashlight is the only warm source</a:t>
+              <a:t>Your flashlight is the only warm light</a:t>
             </a:r>
             <a:endParaRPr lang="en-US" sz="1400" dirty="0"/>
           </a:p>
@@ -4484,7 +4484,7 @@
                 <a:ea typeface="Calibri" pitchFamily="34" charset="-122"/>
                 <a:cs typeface="Calibri" pitchFamily="34" charset="-120"/>
               </a:rPr>
-              <a:t>4200 K, 12 m range, 45° cone. That is all the light you get.</a:t>
+              <a:t>4200 K, 12 m, a 45° cone. That is all the light you get.</a:t>
             </a:r>
             <a:endParaRPr lang="en-US" sz="1150" dirty="0"/>
           </a:p>
@@ -4548,7 +4548,7 @@
                 <a:ea typeface="Calibri" pitchFamily="34" charset="-122"/>
                 <a:cs typeface="Calibri" pitchFamily="34" charset="-120"/>
               </a:rPr>
-              <a:t>Every room has a switchable ceiling light</a:t>
+              <a:t>Every room has a light switch</a:t>
             </a:r>
             <a:endParaRPr lang="en-US" sz="1400" dirty="0"/>
           </a:p>
@@ -4587,7 +4587,7 @@
                 <a:ea typeface="Calibri" pitchFamily="34" charset="-122"/>
                 <a:cs typeface="Calibri" pitchFamily="34" charset="-120"/>
               </a:rPr>
-              <a:t>Light slows sanity loss but makes the ghost likelier to notice you.</a:t>
+              <a:t>Lights slow down sanity loss, but the ghost notices you more.</a:t>
             </a:r>
             <a:endParaRPr lang="en-US" sz="1150" dirty="0"/>
           </a:p>
@@ -4651,7 +4651,7 @@
                 <a:ea typeface="Calibri" pitchFamily="34" charset="-122"/>
                 <a:cs typeface="Calibri" pitchFamily="34" charset="-120"/>
               </a:rPr>
-              <a:t>Hunts shift the whole house red and flicker it</a:t>
+              <a:t>A hunt turns the whole house red</a:t>
             </a:r>
             <a:endParaRPr lang="en-US" sz="1400" dirty="0"/>
           </a:p>
@@ -4690,7 +4690,7 @@
                 <a:ea typeface="Calibri" pitchFamily="34" charset="-122"/>
                 <a:cs typeface="Calibri" pitchFamily="34" charset="-120"/>
               </a:rPr>
-              <a:t>The flashlight dies. There is a chance the power cuts entirely.</a:t>
+              <a:t>Your flashlight stops working. Sometimes the power goes out.</a:t>
             </a:r>
             <a:endParaRPr lang="en-US" sz="1150" dirty="0"/>
           </a:p>
@@ -4754,7 +4754,7 @@
                 <a:ea typeface="Calibri" pitchFamily="34" charset="-122"/>
                 <a:cs typeface="Calibri" pitchFamily="34" charset="-120"/>
               </a:rPr>
-              <a:t>The corridor breaks up sightlines</a:t>
+              <a:t>The corridor blocks your view</a:t>
             </a:r>
             <a:endParaRPr lang="en-US" sz="1400" dirty="0"/>
           </a:p>
@@ -4793,7 +4793,7 @@
                 <a:ea typeface="Calibri" pitchFamily="34" charset="-122"/>
                 <a:cs typeface="Calibri" pitchFamily="34" charset="-120"/>
               </a:rPr>
-              <a:t>You rarely see the whole space at once — footsteps tend to arrive before vision.</a:t>
+              <a:t>You rarely see the whole flat at once. You hear it before you see it.</a:t>
             </a:r>
             <a:endParaRPr lang="en-US" sz="1150" dirty="0"/>
           </a:p>
@@ -4864,7 +4864,7 @@
                 <a:ea typeface="Courier New" pitchFamily="34" charset="-122"/>
                 <a:cs typeface="Courier New" pitchFamily="34" charset="-120"/>
               </a:rPr>
-              <a:t>FILE 11 — ARCHITECTURE</a:t>
+              <a:t>FILE 11 — HOW THE CODE FITS</a:t>
             </a:r>
             <a:endParaRPr lang="en-US" sz="1050" dirty="0"/>
           </a:p>
@@ -4942,7 +4942,7 @@
                 <a:ea typeface="Cambria" pitchFamily="34" charset="-122"/>
                 <a:cs typeface="Cambria" pitchFamily="34" charset="-120"/>
               </a:rPr>
-              <a:t>Zero direct references between modules</a:t>
+              <a:t>No part of the code talks to another part directly</a:t>
             </a:r>
             <a:endParaRPr lang="en-US" sz="3400" dirty="0"/>
           </a:p>
@@ -4981,7 +4981,7 @@
                 <a:ea typeface="Calibri" pitchFamily="34" charset="-122"/>
                 <a:cs typeface="Calibri" pitchFamily="34" charset="-120"/>
               </a:rPr>
-              <a:t>So several AI sessions can write code in parallel without colliding</a:t>
+              <a:t>So two people, or two AI sessions, can write code at the same time</a:t>
             </a:r>
             <a:endParaRPr lang="en-US" sz="1450" dirty="0"/>
           </a:p>
@@ -5086,7 +5086,7 @@
                 <a:ea typeface="Calibri" pitchFamily="34" charset="-122"/>
                 <a:cs typeface="Calibri" pitchFamily="34" charset="-120"/>
               </a:rPr>
-              <a:t>static event bus · 23 events</a:t>
+              <a:t>a message board · 23 messages</a:t>
             </a:r>
             <a:endParaRPr lang="en-US" sz="1250" dirty="0"/>
           </a:p>
@@ -5682,7 +5682,7 @@
                 <a:ea typeface="Calibri" pitchFamily="34" charset="-122"/>
                 <a:cs typeface="Calibri" pitchFamily="34" charset="-120"/>
               </a:rPr>
-              <a:t>01   Everything crosses via the bus</a:t>
+              <a:t>01   Everything goes through the board</a:t>
             </a:r>
             <a:endParaRPr lang="en-US" sz="1350" dirty="0"/>
           </a:p>
@@ -5721,7 +5721,7 @@
                 <a:ea typeface="Calibri" pitchFamily="34" charset="-122"/>
                 <a:cs typeface="Calibri" pitchFamily="34" charset="-120"/>
               </a:rPr>
-              <a:t>Module files may not import another module's namespace</a:t>
+              <a:t>One part of the code may not import another part</a:t>
             </a:r>
             <a:endParaRPr lang="en-US" sz="1100" dirty="0"/>
           </a:p>
@@ -5760,7 +5760,7 @@
                 <a:ea typeface="Calibri" pitchFamily="34" charset="-122"/>
                 <a:cs typeface="Calibri" pitchFamily="34" charset="-120"/>
               </a:rPr>
-              <a:t>02   Four interfaces fixed up front</a:t>
+              <a:t>02   Four interfaces agreed first</a:t>
             </a:r>
             <a:endParaRPr lang="en-US" sz="1350" dirty="0"/>
           </a:p>
@@ -5838,7 +5838,7 @@
                 <a:ea typeface="Calibri" pitchFamily="34" charset="-122"/>
                 <a:cs typeface="Calibri" pitchFamily="34" charset="-120"/>
               </a:rPr>
-              <a:t>03   The contract has one author</a:t>
+              <a:t>03   Only one person edits the rules</a:t>
             </a:r>
             <a:endParaRPr lang="en-US" sz="1350" dirty="0"/>
           </a:p>
@@ -5877,7 +5877,7 @@
                 <a:ea typeface="Calibri" pitchFamily="34" charset="-122"/>
                 <a:cs typeface="Calibri" pitchFamily="34" charset="-120"/>
               </a:rPr>
-              <a:t>7 contract files owned by the lead. The AI cannot touch them</a:t>
+              <a:t>7 files. The AI is not allowed to open them</a:t>
             </a:r>
             <a:endParaRPr lang="en-US" sz="1100" dirty="0"/>
           </a:p>
@@ -5916,7 +5916,7 @@
                 <a:ea typeface="Calibri" pitchFamily="34" charset="-122"/>
                 <a:cs typeface="Calibri" pitchFamily="34" charset="-120"/>
               </a:rPr>
-              <a:t>04   Tunable values are serialized</a:t>
+              <a:t>04   Numbers live in the Inspector</a:t>
             </a:r>
             <a:endParaRPr lang="en-US" sz="1350" dirty="0"/>
           </a:p>
@@ -5955,7 +5955,7 @@
                 <a:ea typeface="Calibri" pitchFamily="34" charset="-122"/>
                 <a:cs typeface="Calibri" pitchFamily="34" charset="-120"/>
               </a:rPr>
-              <a:t>Designers tune in the Inspector, never in code</a:t>
+              <a:t>We tune the game without touching any code</a:t>
             </a:r>
             <a:endParaRPr lang="en-US" sz="1100" dirty="0"/>
           </a:p>
@@ -5994,7 +5994,7 @@
                 <a:ea typeface="Calibri" pitchFamily="34" charset="-122"/>
                 <a:cs typeface="Calibri" pitchFamily="34" charset="-120"/>
               </a:rPr>
-              <a:t>05   Ghosts are data, not classes</a:t>
+              <a:t>05   Ghosts are data, not code</a:t>
             </a:r>
             <a:endParaRPr lang="en-US" sz="1350" dirty="0"/>
           </a:p>
@@ -6033,7 +6033,7 @@
                 <a:ea typeface="Calibri" pitchFamily="34" charset="-122"/>
                 <a:cs typeface="Calibri" pitchFamily="34" charset="-120"/>
               </a:rPr>
-              <a:t>Behavioural differences live in ScriptableObjects</a:t>
+              <a:t>Their differences live in data files</a:t>
             </a:r>
             <a:endParaRPr lang="en-US" sz="1100" dirty="0"/>
           </a:p>
@@ -6182,7 +6182,7 @@
                 <a:ea typeface="Cambria" pitchFamily="34" charset="-122"/>
                 <a:cs typeface="Cambria" pitchFamily="34" charset="-120"/>
               </a:rPr>
-              <a:t>How the code actually got written</a:t>
+              <a:t>How we actually wrote the code</a:t>
             </a:r>
             <a:endParaRPr lang="en-US" sz="3400" dirty="0"/>
           </a:p>
@@ -6221,7 +6221,7 @@
                 <a:ea typeface="Calibri" pitchFamily="34" charset="-122"/>
                 <a:cs typeface="Calibri" pitchFamily="34" charset="-120"/>
               </a:rPr>
-              <a:t>★ The pipeline is a deliverable in its own right</a:t>
+              <a:t>★ We built this tool, and we can use it again</a:t>
             </a:r>
             <a:endParaRPr lang="en-US" sz="1450" dirty="0"/>
           </a:p>
@@ -6368,7 +6368,7 @@
                 <a:ea typeface="Calibri" pitchFamily="34" charset="-122"/>
                 <a:cs typeface="Calibri" pitchFamily="34" charset="-120"/>
               </a:rPr>
-              <a:t>Written by a</a:t>
+              <a:t>A person writes</a:t>
             </a:r>
             <a:endParaRPr lang="en-US" sz="1050" dirty="0"/>
           </a:p>
@@ -6388,7 +6388,7 @@
                 <a:ea typeface="Calibri" pitchFamily="34" charset="-122"/>
                 <a:cs typeface="Calibri" pitchFamily="34" charset="-120"/>
               </a:rPr>
-              <a:t>human. Files,</a:t>
+              <a:t>it. Which files,</a:t>
             </a:r>
             <a:endParaRPr lang="en-US" sz="1050" dirty="0"/>
           </a:p>
@@ -6408,7 +6408,7 @@
                 <a:ea typeface="Calibri" pitchFamily="34" charset="-122"/>
                 <a:cs typeface="Calibri" pitchFamily="34" charset="-120"/>
               </a:rPr>
-              <a:t>values, limits,</a:t>
+              <a:t>which numbers,</a:t>
             </a:r>
             <a:endParaRPr lang="en-US" sz="1050" dirty="0"/>
           </a:p>
@@ -6428,7 +6428,7 @@
                 <a:ea typeface="Calibri" pitchFamily="34" charset="-122"/>
                 <a:cs typeface="Calibri" pitchFamily="34" charset="-120"/>
               </a:rPr>
-              <a:t>acceptance tests</a:t>
+              <a:t>what not to do</a:t>
             </a:r>
             <a:endParaRPr lang="en-US" sz="1050" dirty="0"/>
           </a:p>
@@ -6533,7 +6533,7 @@
                 <a:ea typeface="Cambria" pitchFamily="34" charset="-122"/>
                 <a:cs typeface="Cambria" pitchFamily="34" charset="-120"/>
               </a:rPr>
-              <a:t>Implement</a:t>
+              <a:t>AI writes it</a:t>
             </a:r>
             <a:endParaRPr lang="en-US" sz="1500" dirty="0"/>
           </a:p>
@@ -6595,7 +6595,7 @@
                 <a:ea typeface="Calibri" pitchFamily="34" charset="-122"/>
                 <a:cs typeface="Calibri" pitchFamily="34" charset="-120"/>
               </a:rPr>
-              <a:t>behind the</a:t>
+              <a:t>the code. It</a:t>
             </a:r>
             <a:endParaRPr lang="en-US" sz="1050" dirty="0"/>
           </a:p>
@@ -6615,7 +6615,7 @@
                 <a:ea typeface="Calibri" pitchFamily="34" charset="-122"/>
                 <a:cs typeface="Calibri" pitchFamily="34" charset="-120"/>
               </a:rPr>
-              <a:t>contract. It</a:t>
+              <a:t>cannot change</a:t>
             </a:r>
             <a:endParaRPr lang="en-US" sz="1050" dirty="0"/>
           </a:p>
@@ -6635,7 +6635,7 @@
                 <a:ea typeface="Calibri" pitchFamily="34" charset="-122"/>
                 <a:cs typeface="Calibri" pitchFamily="34" charset="-120"/>
               </a:rPr>
-              <a:t>cannot edit it</a:t>
+              <a:t>the rules</a:t>
             </a:r>
             <a:endParaRPr lang="en-US" sz="1050" dirty="0"/>
           </a:p>
@@ -6740,7 +6740,7 @@
                 <a:ea typeface="Cambria" pitchFamily="34" charset="-122"/>
                 <a:cs typeface="Cambria" pitchFamily="34" charset="-120"/>
               </a:rPr>
-              <a:t>Static gates</a:t>
+              <a:t>Auto check</a:t>
             </a:r>
             <a:endParaRPr lang="en-US" sz="1500" dirty="0"/>
           </a:p>
@@ -6782,7 +6782,7 @@
                 <a:ea typeface="Calibri" pitchFamily="34" charset="-122"/>
                 <a:cs typeface="Calibri" pitchFamily="34" charset="-120"/>
               </a:rPr>
-              <a:t>8 regex rules.</a:t>
+              <a:t>8 text rules.</a:t>
             </a:r>
             <a:endParaRPr lang="en-US" sz="1050" dirty="0"/>
           </a:p>
@@ -6802,7 +6802,7 @@
                 <a:ea typeface="Calibri" pitchFamily="34" charset="-122"/>
                 <a:cs typeface="Calibri" pitchFamily="34" charset="-120"/>
               </a:rPr>
-              <a:t>Any hit sends</a:t>
+              <a:t>One hit and it</a:t>
             </a:r>
             <a:endParaRPr lang="en-US" sz="1050" dirty="0"/>
           </a:p>
@@ -6822,7 +6822,7 @@
                 <a:ea typeface="Calibri" pitchFamily="34" charset="-122"/>
                 <a:cs typeface="Calibri" pitchFamily="34" charset="-120"/>
               </a:rPr>
-              <a:t>it straight back</a:t>
+              <a:t>goes back</a:t>
             </a:r>
             <a:endParaRPr lang="en-US" sz="1050" dirty="0"/>
           </a:p>
@@ -6927,7 +6927,7 @@
                 <a:ea typeface="Cambria" pitchFamily="34" charset="-122"/>
                 <a:cs typeface="Cambria" pitchFamily="34" charset="-120"/>
               </a:rPr>
-              <a:t>Compile</a:t>
+              <a:t>Build it</a:t>
             </a:r>
             <a:endParaRPr lang="en-US" sz="1500" dirty="0"/>
           </a:p>
@@ -6969,7 +6969,7 @@
                 <a:ea typeface="Calibri" pitchFamily="34" charset="-122"/>
                 <a:cs typeface="Calibri" pitchFamily="34" charset="-120"/>
               </a:rPr>
-              <a:t>Headless batch</a:t>
+              <a:t>Unity builds it</a:t>
             </a:r>
             <a:endParaRPr lang="en-US" sz="1050" dirty="0"/>
           </a:p>
@@ -6989,7 +6989,7 @@
                 <a:ea typeface="Calibri" pitchFamily="34" charset="-122"/>
                 <a:cs typeface="Calibri" pitchFamily="34" charset="-120"/>
               </a:rPr>
-              <a:t>mode. Real</a:t>
+              <a:t>with no window.</a:t>
             </a:r>
             <a:endParaRPr lang="en-US" sz="1050" dirty="0"/>
           </a:p>
@@ -7009,7 +7009,7 @@
                 <a:ea typeface="Calibri" pitchFamily="34" charset="-122"/>
                 <a:cs typeface="Calibri" pitchFamily="34" charset="-120"/>
               </a:rPr>
-              <a:t>compiler errors</a:t>
+              <a:t>Real errors</a:t>
             </a:r>
             <a:endParaRPr lang="en-US" sz="1050" dirty="0"/>
           </a:p>
@@ -7114,7 +7114,7 @@
                 <a:ea typeface="Cambria" pitchFamily="34" charset="-122"/>
                 <a:cs typeface="Cambria" pitchFamily="34" charset="-120"/>
               </a:rPr>
-              <a:t>Self-audit</a:t>
+              <a:t>Self check</a:t>
             </a:r>
             <a:endParaRPr lang="en-US" sz="1500" dirty="0"/>
           </a:p>
@@ -7156,7 +7156,7 @@
                 <a:ea typeface="Calibri" pitchFamily="34" charset="-122"/>
                 <a:cs typeface="Calibri" pitchFamily="34" charset="-120"/>
               </a:rPr>
-              <a:t>18-point list,</a:t>
+              <a:t>The AI answers</a:t>
             </a:r>
             <a:endParaRPr lang="en-US" sz="1050" dirty="0"/>
           </a:p>
@@ -7176,7 +7176,7 @@
                 <a:ea typeface="Calibri" pitchFamily="34" charset="-122"/>
                 <a:cs typeface="Calibri" pitchFamily="34" charset="-120"/>
               </a:rPr>
-              <a:t>answered line</a:t>
+              <a:t>18 questions</a:t>
             </a:r>
             <a:endParaRPr lang="en-US" sz="1050" dirty="0"/>
           </a:p>
@@ -7196,7 +7196,7 @@
                 <a:ea typeface="Calibri" pitchFamily="34" charset="-122"/>
                 <a:cs typeface="Calibri" pitchFamily="34" charset="-120"/>
               </a:rPr>
-              <a:t>by line</a:t>
+              <a:t>about its work</a:t>
             </a:r>
             <a:endParaRPr lang="en-US" sz="1050" dirty="0"/>
           </a:p>
@@ -7301,7 +7301,7 @@
                 <a:ea typeface="Cambria" pitchFamily="34" charset="-122"/>
                 <a:cs typeface="Cambria" pitchFamily="34" charset="-120"/>
               </a:rPr>
-              <a:t>Human review</a:t>
+              <a:t>We read it</a:t>
             </a:r>
             <a:endParaRPr lang="en-US" sz="1500" dirty="0"/>
           </a:p>
@@ -7363,7 +7363,7 @@
                 <a:ea typeface="Calibri" pitchFamily="34" charset="-122"/>
                 <a:cs typeface="Calibri" pitchFamily="34" charset="-120"/>
               </a:rPr>
-              <a:t>the diff and</a:t>
+              <a:t>the changes and</a:t>
             </a:r>
             <a:endParaRPr lang="en-US" sz="1050" dirty="0"/>
           </a:p>
@@ -7383,7 +7383,7 @@
                 <a:ea typeface="Calibri" pitchFamily="34" charset="-122"/>
                 <a:cs typeface="Calibri" pitchFamily="34" charset="-120"/>
               </a:rPr>
-              <a:t>passes or rejects</a:t>
+              <a:t>says yes or no</a:t>
             </a:r>
             <a:endParaRPr lang="en-US" sz="1050" dirty="0"/>
           </a:p>
@@ -7422,7 +7422,7 @@
                 <a:ea typeface="Calibri" pitchFamily="34" charset="-122"/>
                 <a:cs typeface="Calibri" pitchFamily="34" charset="-120"/>
               </a:rPr>
-              <a:t>A failure at step 3 or 4 returns automatically to step 2 carrying the raw error text. Two rounds maximum.</a:t>
+              <a:t>If step 3 or step 4 fails, it goes back to step 2 with the error text. Two tries, then it stops.</a:t>
             </a:r>
             <a:endParaRPr lang="en-US" sz="1300" dirty="0"/>
           </a:p>
@@ -7488,7 +7488,7 @@
                 <a:ea typeface="Calibri" pitchFamily="34" charset="-122"/>
                 <a:cs typeface="Calibri" pitchFamily="34" charset="-120"/>
               </a:rPr>
-              <a:t>Humans own design, contract and acceptance. The AI owns implementation.</a:t>
+              <a:t>People decide what to build and whether it is good. The AI writes it.</a:t>
             </a:r>
             <a:endParaRPr lang="en-US" sz="1700" dirty="0"/>
           </a:p>
@@ -7527,7 +7527,7 @@
                 <a:ea typeface="Calibri" pitchFamily="34" charset="-122"/>
                 <a:cs typeface="Calibri" pitchFamily="34" charset="-120"/>
               </a:rPr>
-              <a:t>The author and the reviewer have to be two independent viewpoints. The AI generated the code, but a human wrote the architecture — the event bus, the interfaces, the data structures were fixed as contracts first. An AI can write every script in this project in a day; only a person can tell whether it feels right.</a:t>
+              <a:t>The person who writes it and the person who checks it cannot be the same. We are new to 3D games, so we made the rules very strict before we started: the message board, the interfaces and the data files were all agreed first, and the AI could only fill in behind them. An AI can write every script in this project in a day. Only a person can tell whether the game feels right.</a:t>
             </a:r>
             <a:endParaRPr lang="en-US" sz="1250" dirty="0"/>
           </a:p>
@@ -7676,7 +7676,7 @@
                 <a:ea typeface="Cambria" pitchFamily="34" charset="-122"/>
                 <a:cs typeface="Cambria" pitchFamily="34" charset="-120"/>
               </a:rPr>
-              <a:t>Eight hard gates. One hit and it goes back.</a:t>
+              <a:t>Eight rules the code has to pass</a:t>
             </a:r>
             <a:endParaRPr lang="en-US" sz="3400" dirty="0"/>
           </a:p>
@@ -7715,7 +7715,7 @@
                 <a:ea typeface="Calibri" pitchFamily="34" charset="-122"/>
                 <a:cs typeface="Calibri" pitchFamily="34" charset="-120"/>
               </a:rPr>
-              <a:t>An AI never gets tired — but it will make the same mistake a hundred times</a:t>
+              <a:t>An AI never gets tired, but it makes the same mistake again and again</a:t>
             </a:r>
             <a:endParaRPr lang="en-US" sz="1450" dirty="0"/>
           </a:p>
@@ -7820,7 +7820,7 @@
                 <a:ea typeface="Calibri" pitchFamily="34" charset="-122"/>
                 <a:cs typeface="Calibri" pitchFamily="34" charset="-120"/>
               </a:rPr>
-              <a:t>Deprecated Find APIs are banned</a:t>
+              <a:t>The old Find functions are not allowed</a:t>
             </a:r>
             <a:endParaRPr lang="en-US" sz="1300" dirty="0"/>
           </a:p>
@@ -7964,7 +7964,7 @@
                 <a:ea typeface="Calibri" pitchFamily="34" charset="-122"/>
                 <a:cs typeface="Calibri" pitchFamily="34" charset="-120"/>
               </a:rPr>
-              <a:t>Rigidbody.velocity → linearVelocity</a:t>
+              <a:t>Rigidbody.velocity is now linearVelocity</a:t>
             </a:r>
             <a:endParaRPr lang="en-US" sz="1300" dirty="0"/>
           </a:p>
@@ -8108,7 +8108,7 @@
                 <a:ea typeface="Calibri" pitchFamily="34" charset="-122"/>
                 <a:cs typeface="Calibri" pitchFamily="34" charset="-120"/>
               </a:rPr>
-              <a:t>No legacy Input Manager</a:t>
+              <a:t>Do not use the old Input Manager</a:t>
             </a:r>
             <a:endParaRPr lang="en-US" sz="1300" dirty="0"/>
           </a:p>
@@ -8252,7 +8252,7 @@
                 <a:ea typeface="Calibri" pitchFamily="34" charset="-122"/>
                 <a:cs typeface="Calibri" pitchFamily="34" charset="-120"/>
               </a:rPr>
-              <a:t>CinemachineVirtualCamera was renamed</a:t>
+              <a:t>CinemachineVirtualCamera has a new name</a:t>
             </a:r>
             <a:endParaRPr lang="en-US" sz="1300" dirty="0"/>
           </a:p>
@@ -8396,7 +8396,7 @@
                 <a:ea typeface="Calibri" pitchFamily="34" charset="-122"/>
                 <a:cs typeface="Calibri" pitchFamily="34" charset="-120"/>
               </a:rPr>
-              <a:t>No direct imports between modules</a:t>
+              <a:t>No part may import another part</a:t>
             </a:r>
             <a:endParaRPr lang="en-US" sz="1300" dirty="0"/>
           </a:p>
@@ -8540,7 +8540,7 @@
                 <a:ea typeface="Calibri" pitchFamily="34" charset="-122"/>
                 <a:cs typeface="Calibri" pitchFamily="34" charset="-120"/>
               </a:rPr>
-              <a:t>Tunables must be SerializeField private</a:t>
+              <a:t>Numbers must be SerializeField private</a:t>
             </a:r>
             <a:endParaRPr lang="en-US" sz="1300" dirty="0"/>
           </a:p>
@@ -8684,7 +8684,7 @@
                 <a:ea typeface="Calibri" pitchFamily="34" charset="-122"/>
                 <a:cs typeface="Calibri" pitchFamily="34" charset="-120"/>
               </a:rPr>
-              <a:t>No GameObject.Find by name</a:t>
+              <a:t>Do not use GameObject.Find by name</a:t>
             </a:r>
             <a:endParaRPr lang="en-US" sz="1300" dirty="0"/>
           </a:p>
@@ -8828,7 +8828,7 @@
                 <a:ea typeface="Calibri" pitchFamily="34" charset="-122"/>
                 <a:cs typeface="Calibri" pitchFamily="34" charset="-120"/>
               </a:rPr>
-              <a:t>Strip debug logging before commit</a:t>
+              <a:t>Take the debug logs out before saving</a:t>
             </a:r>
             <a:endParaRPr lang="en-US" sz="1300" dirty="0"/>
           </a:p>
@@ -8933,7 +8933,7 @@
                 <a:ea typeface="Calibri" pitchFamily="34" charset="-122"/>
                 <a:cs typeface="Calibri" pitchFamily="34" charset="-120"/>
               </a:rPr>
-              <a:t>Plus an 18-point self-audit</a:t>
+              <a:t>Plus 18 questions to answer</a:t>
             </a:r>
             <a:endParaRPr lang="en-US" sz="1600" dirty="0"/>
           </a:p>
@@ -8972,7 +8972,7 @@
                 <a:ea typeface="Calibri" pitchFamily="34" charset="-122"/>
                 <a:cs typeface="Calibri" pitchFamily="34" charset="-120"/>
               </a:rPr>
-              <a:t>The AI answers every point on delivery and separately lists anything it decided on its own. Those are usually where the next module's landmines are.</a:t>
+              <a:t>The AI answers all 18 when it hands work in, and lists anything it decided by itself. Those decisions are usually where the next bug comes from.</a:t>
             </a:r>
             <a:endParaRPr lang="en-US" sz="1200" dirty="0"/>
           </a:p>
@@ -9038,7 +9038,7 @@
                 <a:ea typeface="Calibri" pitchFamily="34" charset="-122"/>
                 <a:cs typeface="Calibri" pitchFamily="34" charset="-120"/>
               </a:rPr>
-              <a:t>Gates outrank the self-audit</a:t>
+              <a:t>The auto check wins</a:t>
             </a:r>
             <a:endParaRPr lang="en-US" sz="1500" dirty="0"/>
           </a:p>
@@ -9077,7 +9077,7 @@
                 <a:ea typeface="Calibri" pitchFamily="34" charset="-122"/>
                 <a:cs typeface="Calibri" pitchFamily="34" charset="-120"/>
               </a:rPr>
-              <a:t>A self-audit is what the AI says about itself. A gate is a fact about the source text.</a:t>
+              <a:t>The self check is what the AI says about itself. The auto check reads the real code.</a:t>
             </a:r>
             <a:endParaRPr lang="en-US" sz="1200" dirty="0"/>
           </a:p>
@@ -9143,7 +9143,7 @@
                 <a:ea typeface="Calibri" pitchFamily="34" charset="-122"/>
                 <a:cs typeface="Calibri" pitchFamily="34" charset="-120"/>
               </a:rPr>
-              <a:t>A gate must never accuse the innocent</a:t>
+              <a:t>A check must not blame good code</a:t>
             </a:r>
             <a:endParaRPr lang="en-US" sz="1450" dirty="0"/>
           </a:p>
@@ -9182,7 +9182,7 @@
                 <a:ea typeface="Calibri" pitchFamily="34" charset="-122"/>
                 <a:cs typeface="Calibri" pitchFamily="34" charset="-120"/>
               </a:rPr>
-              <a:t>Our first rule set flagged 2 errors and 15 warnings on a clean tree. All false positives — that doesn't add noise, it burns a whole round.</a:t>
+              <a:t>Our first version found 2 errors and 15 warnings in code that was fine. All of them were wrong, and that wastes a whole round of work.</a:t>
             </a:r>
             <a:endParaRPr lang="en-US" sz="1150" dirty="0"/>
           </a:p>
@@ -9331,7 +9331,7 @@
                 <a:ea typeface="Cambria" pitchFamily="34" charset="-122"/>
                 <a:cs typeface="Cambria" pitchFamily="34" charset="-120"/>
               </a:rPr>
-              <a:t>Eight days, measured</a:t>
+              <a:t>Eight days, in numbers</a:t>
             </a:r>
             <a:endParaRPr lang="en-US" sz="3400" dirty="0"/>
           </a:p>
@@ -9370,7 +9370,7 @@
                 <a:ea typeface="Calibri" pitchFamily="34" charset="-122"/>
                 <a:cs typeface="Calibri" pitchFamily="34" charset="-120"/>
               </a:rPr>
-              <a:t>Every figure is verifiable in the repository</a:t>
+              <a:t>You can check every one of these in our repository</a:t>
             </a:r>
             <a:endParaRPr lang="en-US" sz="1450" dirty="0"/>
           </a:p>
@@ -9475,7 +9475,7 @@
                 <a:ea typeface="Calibri" pitchFamily="34" charset="-122"/>
                 <a:cs typeface="Calibri" pitchFamily="34" charset="-120"/>
               </a:rPr>
-              <a:t>task specifications</a:t>
+              <a:t>task specs</a:t>
             </a:r>
             <a:endParaRPr lang="en-US" sz="1550" dirty="0"/>
           </a:p>
@@ -9514,7 +9514,7 @@
                 <a:ea typeface="Calibri" pitchFamily="34" charset="-122"/>
                 <a:cs typeface="Calibri" pitchFamily="34" charset="-120"/>
               </a:rPr>
-              <a:t>Each one fixes the files, the values and the acceptance criteria</a:t>
+              <a:t>Each one lists the files, the numbers, and how we would test it</a:t>
             </a:r>
             <a:endParaRPr lang="en-US" sz="1150" dirty="0"/>
           </a:p>
@@ -9619,7 +9619,7 @@
                 <a:ea typeface="Calibri" pitchFamily="34" charset="-122"/>
                 <a:cs typeface="Calibri" pitchFamily="34" charset="-120"/>
               </a:rPr>
-              <a:t>pipeline runs</a:t>
+              <a:t>tool runs</a:t>
             </a:r>
             <a:endParaRPr lang="en-US" sz="1550" dirty="0"/>
           </a:p>
@@ -9658,7 +9658,7 @@
                 <a:ea typeface="Calibri" pitchFamily="34" charset="-122"/>
                 <a:cs typeface="Calibri" pitchFamily="34" charset="-120"/>
               </a:rPr>
-              <a:t>Gates, compile and self-audit, start to finish</a:t>
+              <a:t>Auto check, build and self check, all the way through</a:t>
             </a:r>
             <a:endParaRPr lang="en-US" sz="1150" dirty="0"/>
           </a:p>
@@ -9802,7 +9802,7 @@
                 <a:ea typeface="Calibri" pitchFamily="34" charset="-122"/>
                 <a:cs typeface="Calibri" pitchFamily="34" charset="-120"/>
               </a:rPr>
-              <a:t>Contract, implementation, scene and docs kept separate</a:t>
+              <a:t>We kept code, scene and documents in separate commits</a:t>
             </a:r>
             <a:endParaRPr lang="en-US" sz="1150" dirty="0"/>
           </a:p>
@@ -9946,7 +9946,7 @@
                 <a:ea typeface="Calibri" pitchFamily="34" charset="-122"/>
                 <a:cs typeface="Calibri" pitchFamily="34" charset="-120"/>
               </a:rPr>
-              <a:t>34 runtime plus 9 editor assembly tools</a:t>
+              <a:t>34 in the game, plus 9 editor tools we wrote to help us</a:t>
             </a:r>
             <a:endParaRPr lang="en-US" sz="1150" dirty="0"/>
           </a:p>
@@ -10090,7 +10090,7 @@
                 <a:ea typeface="Calibri" pitchFamily="34" charset="-122"/>
                 <a:cs typeface="Calibri" pitchFamily="34" charset="-120"/>
               </a:rPr>
-              <a:t>All module code produced by the AI behind the contract</a:t>
+              <a:t>The AI wrote the game code, inside the rules we set</a:t>
             </a:r>
             <a:endParaRPr lang="en-US" sz="1150" dirty="0"/>
           </a:p>
@@ -10195,7 +10195,7 @@
                 <a:ea typeface="Calibri" pitchFamily="34" charset="-122"/>
                 <a:cs typeface="Calibri" pitchFamily="34" charset="-120"/>
               </a:rPr>
-              <a:t>lines of design docs</a:t>
+              <a:t>lines of documents</a:t>
             </a:r>
             <a:endParaRPr lang="en-US" sz="1550" dirty="0"/>
           </a:p>
@@ -10234,7 +10234,7 @@
                 <a:ea typeface="Calibri" pitchFamily="34" charset="-122"/>
                 <a:cs typeface="Calibri" pitchFamily="34" charset="-120"/>
               </a:rPr>
-              <a:t>GDD, architecture, schedule, review process, onboarding</a:t>
+              <a:t>Design, plan, review steps, and a setup guide for the team</a:t>
             </a:r>
             <a:endParaRPr lang="en-US" sz="1150" dirty="0"/>
           </a:p>
@@ -10383,7 +10383,7 @@
                 <a:ea typeface="Cambria" pitchFamily="34" charset="-122"/>
                 <a:cs typeface="Cambria" pitchFamily="34" charset="-120"/>
               </a:rPr>
-              <a:t>Seven days, two risk gates</a:t>
+              <a:t>Seven days, and two cut-off days</a:t>
             </a:r>
             <a:endParaRPr lang="en-US" sz="3400" dirty="0"/>
           </a:p>
@@ -10422,7 +10422,7 @@
                 <a:ea typeface="Calibri" pitchFamily="34" charset="-122"/>
                 <a:cs typeface="Calibri" pitchFamily="34" charset="-120"/>
               </a:rPr>
-              <a:t>Miss the gate and features get cut. No heroics.</a:t>
+              <a:t>If we missed a date, we cut features. We did not stay up all night.</a:t>
             </a:r>
             <a:endParaRPr lang="en-US" sz="1450" dirty="0"/>
           </a:p>
@@ -10566,7 +10566,7 @@
                 <a:ea typeface="Calibri" pitchFamily="34" charset="-122"/>
                 <a:cs typeface="Calibri" pitchFamily="34" charset="-120"/>
               </a:rPr>
-              <a:t>Project stands up; both members can clone and run it</a:t>
+              <a:t>The project runs, and both of us can open it</a:t>
             </a:r>
             <a:endParaRPr lang="en-US" sz="1250" dirty="0"/>
           </a:p>
@@ -10671,7 +10671,7 @@
                 <a:ea typeface="Calibri" pitchFamily="34" charset="-122"/>
                 <a:cs typeface="Calibri" pitchFamily="34" charset="-120"/>
               </a:rPr>
-              <a:t>Walking and looking</a:t>
+              <a:t>Walk and look</a:t>
             </a:r>
             <a:endParaRPr lang="en-US" sz="1400" dirty="0"/>
           </a:p>
@@ -10710,7 +10710,7 @@
                 <a:ea typeface="Calibri" pitchFamily="34" charset="-122"/>
                 <a:cs typeface="Calibri" pitchFamily="34" charset="-120"/>
               </a:rPr>
-              <a:t>First-person controller, interaction, NavMesh bake</a:t>
+              <a:t>First-person movement, doors, and the AI path map</a:t>
             </a:r>
             <a:endParaRPr lang="en-US" sz="1250" dirty="0"/>
           </a:p>
@@ -10815,7 +10815,7 @@
                 <a:ea typeface="Calibri" pitchFamily="34" charset="-122"/>
                 <a:cs typeface="Calibri" pitchFamily="34" charset="-120"/>
               </a:rPr>
-              <a:t>Instruments in hand</a:t>
+              <a:t>Tools in hand</a:t>
             </a:r>
             <a:endParaRPr lang="en-US" sz="1400" dirty="0"/>
           </a:p>
@@ -10854,7 +10854,7 @@
                 <a:ea typeface="Calibri" pitchFamily="34" charset="-122"/>
                 <a:cs typeface="Calibri" pitchFamily="34" charset="-120"/>
               </a:rPr>
-              <a:t>Equipment slots, flashlight, room system, HUD</a:t>
+              <a:t>Tool slots, flashlight, rooms, and the on-screen display</a:t>
             </a:r>
             <a:endParaRPr lang="en-US" sz="1250" dirty="0"/>
           </a:p>
@@ -10959,7 +10959,7 @@
                 <a:ea typeface="Calibri" pitchFamily="34" charset="-122"/>
                 <a:cs typeface="Calibri" pitchFamily="34" charset="-120"/>
               </a:rPr>
-              <a:t>Evidence loop closed</a:t>
+              <a:t>Clues work</a:t>
             </a:r>
             <a:endParaRPr lang="en-US" sz="1400" dirty="0"/>
           </a:p>
@@ -10998,7 +10998,7 @@
                 <a:ea typeface="Calibri" pitchFamily="34" charset="-122"/>
                 <a:cs typeface="Calibri" pitchFamily="34" charset="-120"/>
               </a:rPr>
-              <a:t>EMF, UV fingerprints, ghost writing, evidence manager</a:t>
+              <a:t>EMF, UV prints, ghost writing, and the clue tracker</a:t>
             </a:r>
             <a:endParaRPr lang="en-US" sz="1250" dirty="0"/>
           </a:p>
@@ -11037,7 +11037,7 @@
                 <a:ea typeface="Courier New" pitchFamily="34" charset="-122"/>
                 <a:cs typeface="Courier New" pitchFamily="34" charset="-120"/>
               </a:rPr>
-              <a:t>RISK GATE</a:t>
+              <a:t>CUT-OFF DAY</a:t>
             </a:r>
             <a:endParaRPr lang="en-US" sz="1150" dirty="0"/>
           </a:p>
@@ -11142,7 +11142,7 @@
                 <a:ea typeface="Calibri" pitchFamily="34" charset="-122"/>
                 <a:cs typeface="Calibri" pitchFamily="34" charset="-120"/>
               </a:rPr>
-              <a:t>The ghost arrives</a:t>
+              <a:t>The ghost</a:t>
             </a:r>
             <a:endParaRPr lang="en-US" sz="1400" dirty="0"/>
           </a:p>
@@ -11181,7 +11181,7 @@
                 <a:ea typeface="Calibri" pitchFamily="34" charset="-122"/>
                 <a:cs typeface="Calibri" pitchFamily="34" charset="-120"/>
               </a:rPr>
-              <a:t>Ghost AI and hunt scheduling — the hardest day of the project</a:t>
+              <a:t>Ghost AI and hunts — our hardest day by far</a:t>
             </a:r>
             <a:endParaRPr lang="en-US" sz="1250" dirty="0"/>
           </a:p>
@@ -11220,7 +11220,7 @@
                 <a:ea typeface="Courier New" pitchFamily="34" charset="-122"/>
                 <a:cs typeface="Courier New" pitchFamily="34" charset="-120"/>
               </a:rPr>
-              <a:t>RISK GATE</a:t>
+              <a:t>CUT-OFF DAY</a:t>
             </a:r>
             <a:endParaRPr lang="en-US" sz="1150" dirty="0"/>
           </a:p>
@@ -11325,7 +11325,7 @@
                 <a:ea typeface="Calibri" pitchFamily="34" charset="-122"/>
                 <a:cs typeface="Calibri" pitchFamily="34" charset="-120"/>
               </a:rPr>
-              <a:t>Full loop running</a:t>
+              <a:t>The whole game runs</a:t>
             </a:r>
             <a:endParaRPr lang="en-US" sz="1400" dirty="0"/>
           </a:p>
@@ -11364,7 +11364,7 @@
                 <a:ea typeface="Calibri" pitchFamily="34" charset="-122"/>
                 <a:cs typeface="Calibri" pitchFamily="34" charset="-120"/>
               </a:rPr>
-              <a:t>Round manager, deduction journal, results screen</a:t>
+              <a:t>Round manager, notebook, and the results screen</a:t>
             </a:r>
             <a:endParaRPr lang="en-US" sz="1250" dirty="0"/>
           </a:p>
@@ -11469,7 +11469,7 @@
                 <a:ea typeface="Calibri" pitchFamily="34" charset="-122"/>
                 <a:cs typeface="Calibri" pitchFamily="34" charset="-120"/>
               </a:rPr>
-              <a:t>Art lands</a:t>
+              <a:t>Art goes in</a:t>
             </a:r>
             <a:endParaRPr lang="en-US" sz="1400" dirty="0"/>
           </a:p>
@@ -11508,7 +11508,7 @@
                 <a:ea typeface="Calibri" pitchFamily="34" charset="-122"/>
                 <a:cs typeface="Calibri" pitchFamily="34" charset="-120"/>
               </a:rPr>
-              <a:t>Swap assets, re-bake NavMesh, replay the whole loop</a:t>
+              <a:t>Swap in models, rebuild the AI path map, play it all again</a:t>
             </a:r>
             <a:endParaRPr lang="en-US" sz="1250" dirty="0"/>
           </a:p>
@@ -11613,7 +11613,7 @@
                 <a:ea typeface="Calibri" pitchFamily="34" charset="-122"/>
                 <a:cs typeface="Calibri" pitchFamily="34" charset="-120"/>
               </a:rPr>
-              <a:t>Polish and hand-off</a:t>
+              <a:t>Polish</a:t>
             </a:r>
             <a:endParaRPr lang="en-US" sz="1400" dirty="0"/>
           </a:p>
@@ -11652,7 +11652,7 @@
                 <a:ea typeface="Calibri" pitchFamily="34" charset="-122"/>
                 <a:cs typeface="Calibri" pitchFamily="34" charset="-120"/>
               </a:rPr>
-              <a:t>Audio, lighting, main menu, acceptance walkthrough</a:t>
+              <a:t>Sound, lights, main menu, and a full test pass</a:t>
             </a:r>
             <a:endParaRPr lang="en-US" sz="1250" dirty="0"/>
           </a:p>
@@ -11691,7 +11691,7 @@
                 <a:ea typeface="Calibri" pitchFamily="34" charset="-122"/>
                 <a:cs typeface="Calibri" pitchFamily="34" charset="-120"/>
               </a:rPr>
-              <a:t>If evidence hadn't closed by day 3, ghost writing was to be cut down to a 2 × 3 table. If the AI hadn't worked by day 4, the art day moved. Neither gate ever fired.</a:t>
+              <a:t>If the clues did not work by Day 3, we would drop ghost writing and use a 2 × 3 table. If the ghost AI did not work by Day 4, the art day would move. We did not have to do either.</a:t>
             </a:r>
             <a:endParaRPr lang="en-US" sz="1300" dirty="0"/>
           </a:p>
@@ -11840,7 +11840,7 @@
                 <a:ea typeface="Cambria" pitchFamily="34" charset="-122"/>
                 <a:cs typeface="Cambria" pitchFamily="34" charset="-120"/>
               </a:rPr>
-              <a:t>The seven things we deliberately did not build</a:t>
+              <a:t>Seven things we chose not to build</a:t>
             </a:r>
             <a:endParaRPr lang="en-US" sz="3400" dirty="0"/>
           </a:p>
@@ -11879,7 +11879,7 @@
                 <a:ea typeface="Calibri" pitchFamily="34" charset="-122"/>
                 <a:cs typeface="Calibri" pitchFamily="34" charset="-120"/>
               </a:rPr>
-              <a:t>Written down so the week couldn't be eaten alive</a:t>
+              <a:t>We wrote this list down so the week would not disappear</a:t>
             </a:r>
             <a:endParaRPr lang="en-US" sz="1450" dirty="0"/>
           </a:p>
@@ -11984,7 +11984,7 @@
                 <a:ea typeface="Calibri" pitchFamily="34" charset="-122"/>
                 <a:cs typeface="Calibri" pitchFamily="34" charset="-120"/>
               </a:rPr>
-              <a:t>Multiplayer</a:t>
+              <a:t>Online multiplayer</a:t>
             </a:r>
             <a:endParaRPr lang="en-US" sz="1550" dirty="0"/>
           </a:p>
@@ -12023,7 +12023,7 @@
                 <a:ea typeface="Calibri" pitchFamily="34" charset="-122"/>
                 <a:cs typeface="Calibri" pitchFamily="34" charset="-120"/>
               </a:rPr>
-              <a:t>Network sync costs three days minimum. It would have eaten the slice.</a:t>
+              <a:t>Network code costs 3 days at least. It would have eaten the whole project.</a:t>
             </a:r>
             <a:endParaRPr lang="en-US" sz="1150" dirty="0"/>
           </a:p>
@@ -12128,7 +12128,7 @@
                 <a:ea typeface="Calibri" pitchFamily="34" charset="-122"/>
                 <a:cs typeface="Calibri" pitchFamily="34" charset="-120"/>
               </a:rPr>
-              <a:t>Voice recognition</a:t>
+              <a:t>Voice input</a:t>
             </a:r>
             <a:endParaRPr lang="en-US" sz="1550" dirty="0"/>
           </a:p>
@@ -12167,7 +12167,7 @@
                 <a:ea typeface="Calibri" pitchFamily="34" charset="-122"/>
                 <a:cs typeface="Calibri" pitchFamily="34" charset="-120"/>
               </a:rPr>
-              <a:t>Depends on a third-party SDK. Unbounded risk.</a:t>
+              <a:t>It needs software from someone else. Too risky for one week.</a:t>
             </a:r>
             <a:endParaRPr lang="en-US" sz="1150" dirty="0"/>
           </a:p>
@@ -12311,7 +12311,7 @@
                 <a:ea typeface="Calibri" pitchFamily="34" charset="-122"/>
                 <a:cs typeface="Calibri" pitchFamily="34" charset="-120"/>
               </a:rPr>
-              <a:t>One polished map beats three grey-boxed ones.</a:t>
+              <a:t>One good map beats three empty ones.</a:t>
             </a:r>
             <a:endParaRPr lang="en-US" sz="1150" dirty="0"/>
           </a:p>
@@ -12455,7 +12455,7 @@
                 <a:ea typeface="Calibri" pitchFamily="34" charset="-122"/>
                 <a:cs typeface="Calibri" pitchFamily="34" charset="-120"/>
               </a:rPr>
-              <a:t>It would break the mathematical closure of the 3 × 3 matrix.</a:t>
+              <a:t>The 3 × 3 table would stop working.</a:t>
             </a:r>
             <a:endParaRPr lang="en-US" sz="1150" dirty="0"/>
           </a:p>
@@ -12560,7 +12560,7 @@
                 <a:ea typeface="Calibri" pitchFamily="34" charset="-122"/>
                 <a:cs typeface="Calibri" pitchFamily="34" charset="-120"/>
               </a:rPr>
-              <a:t>Saves and progression</a:t>
+              <a:t>Save files</a:t>
             </a:r>
             <a:endParaRPr lang="en-US" sz="1550" dirty="0"/>
           </a:p>
@@ -12599,7 +12599,7 @@
                 <a:ea typeface="Calibri" pitchFamily="34" charset="-122"/>
                 <a:cs typeface="Calibri" pitchFamily="34" charset="-120"/>
               </a:rPr>
-              <a:t>A vertical slice does not need it.</a:t>
+              <a:t>A demo does not need them.</a:t>
             </a:r>
             <a:endParaRPr lang="en-US" sz="1150" dirty="0"/>
           </a:p>
@@ -12743,7 +12743,7 @@
                 <a:ea typeface="Calibri" pitchFamily="34" charset="-122"/>
                 <a:cs typeface="Calibri" pitchFamily="34" charset="-120"/>
               </a:rPr>
-              <a:t>If you can jump you can climb furniture — it breaks level closure and navmesh.</a:t>
+              <a:t>If you can jump you can climb on furniture. That breaks the level and the AI paths.</a:t>
             </a:r>
             <a:endParaRPr lang="en-US" sz="1150" dirty="0"/>
           </a:p>
@@ -12848,7 +12848,7 @@
                 <a:ea typeface="Calibri" pitchFamily="34" charset="-122"/>
                 <a:cs typeface="Calibri" pitchFamily="34" charset="-120"/>
               </a:rPr>
-              <a:t>Original art assets</a:t>
+              <a:t>Our own 3D models</a:t>
             </a:r>
             <a:endParaRPr lang="en-US" sz="1550" dirty="0"/>
           </a:p>
@@ -12887,7 +12887,7 @@
                 <a:ea typeface="Calibri" pitchFamily="34" charset="-122"/>
                 <a:cs typeface="Calibri" pitchFamily="34" charset="-120"/>
               </a:rPr>
-              <a:t>All free-licensed. Consistency of style beats fidelity of any one piece.</a:t>
+              <a:t>We used free ones. One clear style beats one nice-looking chair.</a:t>
             </a:r>
             <a:endParaRPr lang="en-US" sz="1150" dirty="0"/>
           </a:p>
@@ -12953,7 +12953,7 @@
                 <a:ea typeface="Cambria" pitchFamily="34" charset="-122"/>
                 <a:cs typeface="Cambria" pitchFamily="34" charset="-120"/>
               </a:rPr>
-              <a:t>A team that can tell you what it isn't building is ten times more credible.</a:t>
+              <a:t>A team that can tell you what it is NOT making is easier to trust.</a:t>
             </a:r>
             <a:endParaRPr lang="en-US" sz="1500" dirty="0"/>
           </a:p>
@@ -13102,7 +13102,7 @@
                 <a:ea typeface="Cambria" pitchFamily="34" charset="-122"/>
                 <a:cs typeface="Cambria" pitchFamily="34" charset="-120"/>
               </a:rPr>
-              <a:t>What you're about to watch</a:t>
+              <a:t>What you are about to watch</a:t>
             </a:r>
             <a:endParaRPr lang="en-US" sz="3400" dirty="0"/>
           </a:p>
@@ -13141,7 +13141,7 @@
                 <a:ea typeface="Calibri" pitchFamily="34" charset="-122"/>
                 <a:cs typeface="Calibri" pitchFamily="34" charset="-120"/>
               </a:rPr>
-              <a:t>Eight to twelve minutes, one complete loop</a:t>
+              <a:t>About 8 to 12 minutes, one full game</a:t>
             </a:r>
             <a:endParaRPr lang="en-US" sz="1450" dirty="0"/>
           </a:p>
@@ -13246,7 +13246,7 @@
                 <a:ea typeface="Cambria" pitchFamily="34" charset="-122"/>
                 <a:cs typeface="Cambria" pitchFamily="34" charset="-120"/>
               </a:rPr>
-              <a:t>Enter</a:t>
+              <a:t>Go in</a:t>
             </a:r>
             <a:endParaRPr lang="en-US" sz="1700" dirty="0"/>
           </a:p>
@@ -13285,7 +13285,7 @@
                 <a:ea typeface="Calibri" pitchFamily="34" charset="-122"/>
                 <a:cs typeface="Calibri" pitchFamily="34" charset="-120"/>
               </a:rPr>
-              <a:t>The entrance is the safe zone. Three instruments; the flashlight takes a slot</a:t>
+              <a:t>The lobby is safe. Three tools, and the flashlight takes one slot</a:t>
             </a:r>
             <a:endParaRPr lang="en-US" sz="1150" dirty="0"/>
           </a:p>
@@ -13429,7 +13429,7 @@
                 <a:ea typeface="Calibri" pitchFamily="34" charset="-122"/>
                 <a:cs typeface="Calibri" pitchFamily="34" charset="-120"/>
               </a:rPr>
-              <a:t>One of seven, drawn at random. Temperature drop plus EMF</a:t>
+              <a:t>One of seven, picked at random. Cold air and the EMF reader</a:t>
             </a:r>
             <a:endParaRPr lang="en-US" sz="1150" dirty="0"/>
           </a:p>
@@ -13534,7 +13534,7 @@
                 <a:ea typeface="Cambria" pitchFamily="34" charset="-122"/>
                 <a:cs typeface="Cambria" pitchFamily="34" charset="-120"/>
               </a:rPr>
-              <a:t>Gather evidence</a:t>
+              <a:t>Get the clues</a:t>
             </a:r>
             <a:endParaRPr lang="en-US" sz="1700" dirty="0"/>
           </a:p>
@@ -13573,7 +13573,7 @@
                 <a:ea typeface="Calibri" pitchFamily="34" charset="-122"/>
                 <a:cs typeface="Calibri" pitchFamily="34" charset="-120"/>
               </a:rPr>
-              <a:t>Chase the reading · sweep for prints · plant the book and return</a:t>
+              <a:t>Follow the number · look for prints · leave the book and come back</a:t>
             </a:r>
             <a:endParaRPr lang="en-US" sz="1150" dirty="0"/>
           </a:p>
@@ -13678,7 +13678,7 @@
                 <a:ea typeface="Cambria" pitchFamily="34" charset="-122"/>
                 <a:cs typeface="Cambria" pitchFamily="34" charset="-120"/>
               </a:rPr>
-              <a:t>Sanity drops below 50 %</a:t>
+              <a:t>Sanity drops under 50 %</a:t>
             </a:r>
             <a:endParaRPr lang="en-US" sz="1700" dirty="0"/>
           </a:p>
@@ -13717,7 +13717,7 @@
                 <a:ea typeface="Calibri" pitchFamily="34" charset="-122"/>
                 <a:cs typeface="Calibri" pitchFamily="34" charset="-120"/>
               </a:rPr>
-              <a:t>Rolled every 25 seconds. Lights start flickering. The heartbeat comes up</a:t>
+              <a:t>Checked every 25 seconds. Lights flicker. A heartbeat starts</a:t>
             </a:r>
             <a:endParaRPr lang="en-US" sz="1150" dirty="0"/>
           </a:p>
@@ -13861,7 +13861,7 @@
                 <a:ea typeface="Calibri" pitchFamily="34" charset="-122"/>
                 <a:cs typeface="Calibri" pitchFamily="34" charset="-120"/>
               </a:rPr>
-              <a:t>The house goes red, the flashlight dies. Corner, door, break line of sight</a:t>
+              <a:t>The house turns red, the flashlight dies. Corner, door, get out of sight</a:t>
             </a:r>
             <a:endParaRPr lang="en-US" sz="1150" dirty="0"/>
           </a:p>
@@ -13966,7 +13966,7 @@
                 <a:ea typeface="Cambria" pitchFamily="34" charset="-122"/>
                 <a:cs typeface="Cambria" pitchFamily="34" charset="-120"/>
               </a:rPr>
-              <a:t>Evacuate and call it</a:t>
+              <a:t>Leave and answer</a:t>
             </a:r>
             <a:endParaRPr lang="en-US" sz="1700" dirty="0"/>
           </a:p>
@@ -14005,7 +14005,7 @@
                 <a:ea typeface="Calibri" pitchFamily="34" charset="-122"/>
                 <a:cs typeface="Calibri" pitchFamily="34" charset="-120"/>
               </a:rPr>
-              <a:t>Back to the entrance, tick two clues in the journal, name the ghost</a:t>
+              <a:t>Back to the lobby, tick two clues, and pick a ghost</a:t>
             </a:r>
             <a:endParaRPr lang="en-US" sz="1150" dirty="0"/>
           </a:p>
@@ -14110,7 +14110,7 @@
                 <a:ea typeface="Calibri" pitchFamily="34" charset="-122"/>
                 <a:cs typeface="Calibri" pitchFamily="34" charset="-120"/>
               </a:rPr>
-              <a:t>Correct + both clues + sanity above 30 %</a:t>
+              <a:t>Right answer, both clues, sanity over 30 %</a:t>
             </a:r>
             <a:endParaRPr lang="en-US" sz="1150" dirty="0"/>
           </a:p>
@@ -14215,7 +14215,7 @@
                 <a:ea typeface="Calibri" pitchFamily="34" charset="-122"/>
                 <a:cs typeface="Calibri" pitchFamily="34" charset="-120"/>
               </a:rPr>
-              <a:t>Correct call</a:t>
+              <a:t>Right answer</a:t>
             </a:r>
             <a:endParaRPr lang="en-US" sz="1150" dirty="0"/>
           </a:p>
@@ -14320,7 +14320,7 @@
                 <a:ea typeface="Calibri" pitchFamily="34" charset="-122"/>
                 <a:cs typeface="Calibri" pitchFamily="34" charset="-120"/>
               </a:rPr>
-              <a:t>Wrong call, walked out alive</a:t>
+              <a:t>Wrong answer, but got out alive</a:t>
             </a:r>
             <a:endParaRPr lang="en-US" sz="1150" dirty="0"/>
           </a:p>
@@ -14488,7 +14488,7 @@
               <a:buNone/>
             </a:pPr>
             <a:r>
-              <a:rPr lang="en-US" sz="4200" b="1" dirty="0">
+              <a:rPr lang="en-US" sz="3600" b="1" dirty="0">
                 <a:solidFill>
                   <a:srgbClr val="E9EDF3"/>
                 </a:solidFill>
@@ -14496,9 +14496,9 @@
                 <a:ea typeface="Cambria" pitchFamily="34" charset="-122"/>
                 <a:cs typeface="Cambria" pitchFamily="34" charset="-120"/>
               </a:rPr>
-              <a:t>Zero to a playable run, in eight days.</a:t>
-            </a:r>
-            <a:endParaRPr lang="en-US" sz="4200" dirty="0"/>
+              <a:t>Eight days, from nothing to a playable game.</a:t>
+            </a:r>
+            <a:endParaRPr lang="en-US" sz="3600" dirty="0"/>
           </a:p>
         </p:txBody>
       </p:sp>
@@ -14535,7 +14535,7 @@
                 <a:ea typeface="Calibri" pitchFamily="34" charset="-122"/>
                 <a:cs typeface="Calibri" pitchFamily="34" charset="-120"/>
               </a:rPr>
-              <a:t>We didn't build a bigger game. We built one that closes.</a:t>
+              <a:t>We did not make a bigger game. We made one that finishes.</a:t>
             </a:r>
             <a:endParaRPr lang="en-US" sz="1900" dirty="0"/>
           </a:p>
@@ -14640,7 +14640,7 @@
                 <a:ea typeface="Calibri" pitchFamily="34" charset="-122"/>
                 <a:cs typeface="Calibri" pitchFamily="34" charset="-120"/>
               </a:rPr>
-              <a:t>A deduction core that closes mathematically</a:t>
+              <a:t>A clue table that always works</a:t>
             </a:r>
             <a:endParaRPr lang="en-US" sz="1500" dirty="0"/>
           </a:p>
@@ -14679,7 +14679,7 @@
                 <a:ea typeface="Calibri" pitchFamily="34" charset="-122"/>
                 <a:cs typeface="Calibri" pitchFamily="34" charset="-120"/>
               </a:rPr>
-              <a:t>3 ghosts × 3 clues. Two clues decide it. No luck involved.</a:t>
+              <a:t>3 ghosts × 3 clues. Two clues give one answer. No luck.</a:t>
             </a:r>
             <a:endParaRPr lang="en-US" sz="1200" dirty="0"/>
           </a:p>
@@ -14784,7 +14784,7 @@
                 <a:ea typeface="Calibri" pitchFamily="34" charset="-122"/>
                 <a:cs typeface="Calibri" pitchFamily="34" charset="-120"/>
               </a:rPr>
-              <a:t>A production pipeline that transfers</a:t>
+              <a:t>A way of working we can use again</a:t>
             </a:r>
             <a:endParaRPr lang="en-US" sz="1500" dirty="0"/>
           </a:p>
@@ -14823,7 +14823,7 @@
                 <a:ea typeface="Calibri" pitchFamily="34" charset="-122"/>
                 <a:cs typeface="Calibri" pitchFamily="34" charset="-120"/>
               </a:rPr>
-              <a:t>Spec → AI → gates → compile → self-audit → human review</a:t>
+              <a:t>Spec → AI → auto check → build → self check → a person reads it</a:t>
             </a:r>
             <a:endParaRPr lang="en-US" sz="1200" dirty="0"/>
           </a:p>
@@ -14928,7 +14928,7 @@
                 <a:ea typeface="Calibri" pitchFamily="34" charset="-122"/>
                 <a:cs typeface="Calibri" pitchFamily="34" charset="-120"/>
               </a:rPr>
-              <a:t>An architecture contract fixed in advance</a:t>
+              <a:t>Rules we agreed before we started</a:t>
             </a:r>
             <a:endParaRPr lang="en-US" sz="1500" dirty="0"/>
           </a:p>
@@ -14967,7 +14967,7 @@
                 <a:ea typeface="Calibri" pitchFamily="34" charset="-122"/>
                 <a:cs typeface="Calibri" pitchFamily="34" charset="-120"/>
               </a:rPr>
-              <a:t>Zero direct references, so any two modules can be built in parallel</a:t>
+              <a:t>No part touches another, so we could all work at the same time</a:t>
             </a:r>
             <a:endParaRPr lang="en-US" sz="1200" dirty="0"/>
           </a:p>
@@ -14981,20 +14981,23 @@
         </p:nvSpPr>
         <p:spPr>
           <a:xfrm>
-            <a:off x="685800" y="4901184"/>
-            <a:ext cx="10820095" cy="329184"/>
-          </a:xfrm>
-          <a:prstGeom prst="rect">
-            <a:avLst/>
-          </a:prstGeom>
-          <a:noFill/>
-          <a:ln/>
-        </p:spPr>
-        <p:txBody>
-          <a:bodyPr wrap="square" lIns="0" tIns="0" rIns="0" bIns="0" rtlCol="0" anchor="ctr"/>
-          <a:lstStyle/>
-          <a:p>
-            <a:pPr indent="0" marL="0">
+            <a:off x="685800" y="4791456"/>
+            <a:ext cx="10820095" cy="658368"/>
+          </a:xfrm>
+          <a:prstGeom prst="rect">
+            <a:avLst/>
+          </a:prstGeom>
+          <a:noFill/>
+          <a:ln/>
+        </p:spPr>
+        <p:txBody>
+          <a:bodyPr wrap="square" lIns="0" tIns="0" rIns="0" bIns="0" rtlCol="0" anchor="ctr"/>
+          <a:lstStyle/>
+          <a:p>
+            <a:pPr indent="0" marL="0">
+              <a:lnSpc>
+                <a:spcPts val="2000"/>
+              </a:lnSpc>
               <a:buNone/>
             </a:pPr>
             <a:r>
@@ -15006,7 +15009,27 @@
                 <a:ea typeface="Calibri" pitchFamily="34" charset="-122"/>
                 <a:cs typeface="Calibri" pitchFamily="34" charset="-120"/>
               </a:rPr>
-              <a:t>Next: a thermometer as a fourth clue, expanding to 4 × 4 and supporting six ghosts · a second map · incense and crucifix · local co-op</a:t>
+              <a:t>This was our first 3D game, and most of the eight days went into deciding what NOT to build.</a:t>
+            </a:r>
+            <a:endParaRPr lang="en-US" sz="1300" dirty="0"/>
+          </a:p>
+          <a:p>
+            <a:pPr indent="0" marL="0">
+              <a:lnSpc>
+                <a:spcPts val="2000"/>
+              </a:lnSpc>
+              <a:buNone/>
+            </a:pPr>
+            <a:r>
+              <a:rPr lang="en-US" sz="1300" dirty="0">
+                <a:solidFill>
+                  <a:srgbClr val="8D9AAD"/>
+                </a:solidFill>
+                <a:latin typeface="Calibri" pitchFamily="34" charset="0"/>
+                <a:ea typeface="Calibri" pitchFamily="34" charset="-122"/>
+                <a:cs typeface="Calibri" pitchFamily="34" charset="-120"/>
+              </a:rPr>
+              <a:t>Next: a thermometer as a fourth clue, which gives a 4 × 4 table and six ghosts · a second map · two players on one PC</a:t>
             </a:r>
             <a:endParaRPr lang="en-US" sz="1300" dirty="0"/>
           </a:p>
@@ -15272,7 +15295,7 @@
                 <a:ea typeface="Calibri" pitchFamily="34" charset="-122"/>
                 <a:cs typeface="Calibri" pitchFamily="34" charset="-120"/>
               </a:rPr>
-              <a:t>If you only get one line, say this one</a:t>
+              <a:t>If we only get to say one thing, this is it</a:t>
             </a:r>
             <a:endParaRPr lang="en-US" sz="1450" dirty="0"/>
           </a:p>
@@ -15313,7 +15336,7 @@
         </p:nvSpPr>
         <p:spPr>
           <a:xfrm>
-            <a:off x="1143000" y="2103120"/>
+            <a:off x="1143000" y="2121408"/>
             <a:ext cx="9905695" cy="914400"/>
           </a:xfrm>
           <a:prstGeom prst="rect">
@@ -15328,12 +15351,12 @@
           <a:p>
             <a:pPr indent="0" marL="0">
               <a:lnSpc>
-                <a:spcPts val="3200"/>
+                <a:spcPts val="3000"/>
               </a:lnSpc>
               <a:buNone/>
             </a:pPr>
             <a:r>
-              <a:rPr lang="en-US" sz="2000" dirty="0">
+              <a:rPr lang="en-US" sz="1900" dirty="0">
                 <a:solidFill>
                   <a:srgbClr val="E9EDF3"/>
                 </a:solidFill>
@@ -15341,9 +15364,9 @@
                 <a:ea typeface="Calibri" pitchFamily="34" charset="-122"/>
                 <a:cs typeface="Calibri" pitchFamily="34" charset="-120"/>
               </a:rPr>
-              <a:t>You walk into a house you shouldn't be in with three instruments. Before your sanity runs out, you must identify what is haunting it — and get back out alive.</a:t>
-            </a:r>
-            <a:endParaRPr lang="en-US" sz="2000" dirty="0"/>
+              <a:t>You go into a house you should not be in, carrying three tools. Before your sanity runs out, you have to work out what is haunting it and get back out alive.</a:t>
+            </a:r>
+            <a:endParaRPr lang="en-US" sz="1900" dirty="0"/>
           </a:p>
         </p:txBody>
       </p:sp>
@@ -15446,7 +15469,7 @@
                 <a:ea typeface="Calibri" pitchFamily="34" charset="-122"/>
                 <a:cs typeface="Calibri" pitchFamily="34" charset="-120"/>
               </a:rPr>
-              <a:t>minutes per run</a:t>
+              <a:t>minutes per game</a:t>
             </a:r>
             <a:endParaRPr lang="en-US" sz="1300" dirty="0"/>
           </a:p>
@@ -15551,7 +15574,7 @@
                 <a:ea typeface="Calibri" pitchFamily="34" charset="-122"/>
                 <a:cs typeface="Calibri" pitchFamily="34" charset="-120"/>
               </a:rPr>
-              <a:t>ghosts, three data assets</a:t>
+              <a:t>ghosts</a:t>
             </a:r>
             <a:endParaRPr lang="en-US" sz="1300" dirty="0"/>
           </a:p>
@@ -15656,7 +15679,7 @@
                 <a:ea typeface="Calibri" pitchFamily="34" charset="-122"/>
                 <a:cs typeface="Calibri" pitchFamily="34" charset="-120"/>
               </a:rPr>
-              <a:t>kinds of evidence, three fears</a:t>
+              <a:t>kinds of evidence</a:t>
             </a:r>
             <a:endParaRPr lang="en-US" sz="1300" dirty="0"/>
           </a:p>
@@ -15761,7 +15784,7 @@
                 <a:ea typeface="Calibri" pitchFamily="34" charset="-122"/>
                 <a:cs typeface="Calibri" pitchFamily="34" charset="-120"/>
               </a:rPr>
-              <a:t>of them settle it for good</a:t>
+              <a:t>clues give you the answer</a:t>
             </a:r>
             <a:endParaRPr lang="en-US" sz="1300" dirty="0"/>
           </a:p>
@@ -15800,7 +15823,7 @@
                 <a:ea typeface="Calibri" pitchFamily="34" charset="-122"/>
                 <a:cs typeface="Calibri" pitchFamily="34" charset="-120"/>
               </a:rPr>
-              <a:t>Benchmarked against Phasmophobia — we copy its deductive structure, not its content volume.</a:t>
+              <a:t>We looked at Phasmophobia. We copied the way it makes you think, not the amount of stuff in it.</a:t>
             </a:r>
             <a:endParaRPr lang="en-US" sz="1300" dirty="0"/>
           </a:p>
@@ -15949,7 +15972,7 @@
                 <a:ea typeface="Cambria" pitchFamily="34" charset="-122"/>
                 <a:cs typeface="Cambria" pitchFamily="34" charset="-120"/>
               </a:rPr>
-              <a:t>Decision one: cut it down to 3 × 3</a:t>
+              <a:t>Choice one: keep it small on purpose</a:t>
             </a:r>
             <a:endParaRPr lang="en-US" sz="3400" dirty="0"/>
           </a:p>
@@ -15988,7 +16011,7 @@
                 <a:ea typeface="Calibri" pitchFamily="34" charset="-122"/>
                 <a:cs typeface="Calibri" pitchFamily="34" charset="-120"/>
               </a:rPr>
-              <a:t>Content volume is not where the fun comes from</a:t>
+              <a:t>More content does not mean more fun</a:t>
             </a:r>
             <a:endParaRPr lang="en-US" sz="1450" dirty="0"/>
           </a:p>
@@ -16097,7 +16120,7 @@
                 <a:ea typeface="Calibri" pitchFamily="34" charset="-122"/>
                 <a:cs typeface="Calibri" pitchFamily="34" charset="-120"/>
               </a:rPr>
-              <a:t>24 ghost types</a:t>
+              <a:t>24 ghosts</a:t>
             </a:r>
             <a:endParaRPr lang="en-US" sz="1400" dirty="0"/>
           </a:p>
@@ -16139,7 +16162,7 @@
                 <a:ea typeface="Calibri" pitchFamily="34" charset="-122"/>
                 <a:cs typeface="Calibri" pitchFamily="34" charset="-120"/>
               </a:rPr>
-              <a:t>40+ items</a:t>
+              <a:t>More than 40 tools</a:t>
             </a:r>
             <a:endParaRPr lang="en-US" sz="1400" dirty="0"/>
           </a:p>
@@ -16160,7 +16183,7 @@
                 <a:ea typeface="Calibri" pitchFamily="34" charset="-122"/>
                 <a:cs typeface="Calibri" pitchFamily="34" charset="-120"/>
               </a:rPr>
-              <a:t>Evidence sets overlap; players end up guessing</a:t>
+              <a:t>Ghosts share clues, so players still guess</a:t>
             </a:r>
             <a:endParaRPr lang="en-US" sz="1400" dirty="0"/>
           </a:p>
@@ -16269,7 +16292,7 @@
                 <a:ea typeface="Calibri" pitchFamily="34" charset="-122"/>
                 <a:cs typeface="Calibri" pitchFamily="34" charset="-120"/>
               </a:rPr>
-              <a:t>3 ghost types</a:t>
+              <a:t>3 ghosts</a:t>
             </a:r>
             <a:endParaRPr lang="en-US" sz="1400" dirty="0"/>
           </a:p>
@@ -16311,7 +16334,7 @@
                 <a:ea typeface="Calibri" pitchFamily="34" charset="-122"/>
                 <a:cs typeface="Calibri" pitchFamily="34" charset="-120"/>
               </a:rPr>
-              <a:t>4 items plus one deduction journal</a:t>
+              <a:t>4 tools and one notebook</a:t>
             </a:r>
             <a:endParaRPr lang="en-US" sz="1400" dirty="0"/>
           </a:p>
@@ -16332,7 +16355,7 @@
                 <a:ea typeface="Calibri" pitchFamily="34" charset="-122"/>
                 <a:cs typeface="Calibri" pitchFamily="34" charset="-120"/>
               </a:rPr>
-              <a:t>Zero overlap; any two clues are decisive</a:t>
+              <a:t>No sharing problem. Two clues, one answer</a:t>
             </a:r>
             <a:endParaRPr lang="en-US" sz="1400" dirty="0"/>
           </a:p>
@@ -16371,7 +16394,7 @@
                 <a:ea typeface="Calibri" pitchFamily="34" charset="-122"/>
                 <a:cs typeface="Calibri" pitchFamily="34" charset="-120"/>
               </a:rPr>
-              <a:t>That game's appeal really comes down to three things — and all three survive at minimum scale:</a:t>
+              <a:t>We think that game is fun for three reasons. All three still work when the game is small:</a:t>
             </a:r>
             <a:endParaRPr lang="en-US" sz="1500" dirty="0"/>
           </a:p>
@@ -16437,7 +16460,7 @@
                 <a:ea typeface="Calibri" pitchFamily="34" charset="-122"/>
                 <a:cs typeface="Calibri" pitchFamily="34" charset="-120"/>
               </a:rPr>
-              <a:t>Asymmetric information</a:t>
+              <a:t>You don't know what it is</a:t>
             </a:r>
             <a:endParaRPr lang="en-US" sz="1550" dirty="0"/>
           </a:p>
@@ -16476,7 +16499,7 @@
                 <a:ea typeface="Calibri" pitchFamily="34" charset="-122"/>
                 <a:cs typeface="Calibri" pitchFamily="34" charset="-120"/>
               </a:rPr>
-              <a:t>You know it's there. You don't know what, or where.</a:t>
+              <a:t>You know something is in the house. You just don't know what, or where.</a:t>
             </a:r>
             <a:endParaRPr lang="en-US" sz="1250" dirty="0"/>
           </a:p>
@@ -16542,7 +16565,7 @@
                 <a:ea typeface="Calibri" pitchFamily="34" charset="-122"/>
                 <a:cs typeface="Calibri" pitchFamily="34" charset="-120"/>
               </a:rPr>
-              <a:t>Deduction under constraint</a:t>
+              <a:t>You have to work it out</a:t>
             </a:r>
             <a:endParaRPr lang="en-US" sz="1550" dirty="0"/>
           </a:p>
@@ -16581,7 +16604,7 @@
                 <a:ea typeface="Calibri" pitchFamily="34" charset="-122"/>
                 <a:cs typeface="Calibri" pitchFamily="34" charset="-120"/>
               </a:rPr>
-              <a:t>Elimination, using a limited toolkit</a:t>
+              <a:t>You use clues to rule ghosts out, one at a time.</a:t>
             </a:r>
             <a:endParaRPr lang="en-US" sz="1250" dirty="0"/>
           </a:p>
@@ -16647,7 +16670,7 @@
                 <a:ea typeface="Calibri" pitchFamily="34" charset="-122"/>
                 <a:cs typeface="Calibri" pitchFamily="34" charset="-120"/>
               </a:rPr>
-              <a:t>Risk pulling against reward</a:t>
+              <a:t>Staying is dangerous</a:t>
             </a:r>
             <a:endParaRPr lang="en-US" sz="1550" dirty="0"/>
           </a:p>
@@ -16686,7 +16709,7 @@
                 <a:ea typeface="Calibri" pitchFamily="34" charset="-122"/>
                 <a:cs typeface="Calibri" pitchFamily="34" charset="-120"/>
               </a:rPr>
-              <a:t>One more second is one more clue, and one more chance to die</a:t>
+              <a:t>One more second is one more clue — and one more chance to die.</a:t>
             </a:r>
             <a:endParaRPr lang="en-US" sz="1250" dirty="0"/>
           </a:p>
@@ -16757,7 +16780,7 @@
                 <a:ea typeface="Courier New" pitchFamily="34" charset="-122"/>
                 <a:cs typeface="Courier New" pitchFamily="34" charset="-120"/>
               </a:rPr>
-              <a:t>FILE 04 — THE MATRIX</a:t>
+              <a:t>FILE 04 — THE TABLE</a:t>
             </a:r>
             <a:endParaRPr lang="en-US" sz="1050" dirty="0"/>
           </a:p>
@@ -16835,7 +16858,7 @@
                 <a:ea typeface="Cambria" pitchFamily="34" charset="-122"/>
                 <a:cs typeface="Cambria" pitchFamily="34" charset="-120"/>
               </a:rPr>
-              <a:t>The core: a 3 × 3 deduction matrix</a:t>
+              <a:t>The heart of the game: a 3 × 3 table</a:t>
             </a:r>
             <a:endParaRPr lang="en-US" sz="3400" dirty="0"/>
           </a:p>
@@ -16874,7 +16897,7 @@
                 <a:ea typeface="Calibri" pitchFamily="34" charset="-122"/>
                 <a:cs typeface="Calibri" pitchFamily="34" charset="-120"/>
               </a:rPr>
-              <a:t>★ The most important slide in the deck</a:t>
+              <a:t>★ The most important slide</a:t>
             </a:r>
             <a:endParaRPr lang="en-US" sz="1450" dirty="0"/>
           </a:p>
@@ -16913,7 +16936,7 @@
                 <a:ea typeface="Calibri" pitchFamily="34" charset="-122"/>
                 <a:cs typeface="Calibri" pitchFamily="34" charset="-120"/>
               </a:rPr>
-              <a:t>EMF-5 reading</a:t>
+              <a:t>EMF reading</a:t>
             </a:r>
             <a:endParaRPr lang="en-US" sz="1450" dirty="0"/>
           </a:p>
@@ -17606,7 +17629,7 @@
                 <a:ea typeface="Calibri" pitchFamily="34" charset="-122"/>
                 <a:cs typeface="Calibri" pitchFamily="34" charset="-120"/>
               </a:rPr>
-              <a:t>Every ghost has exactly two — and the three ghosts fill all three pairs.</a:t>
+              <a:t>Every ghost has exactly two. The three ghosts use up all three pairs.</a:t>
             </a:r>
             <a:endParaRPr lang="en-US" sz="1900" dirty="0"/>
           </a:p>
@@ -17645,7 +17668,7 @@
                 <a:ea typeface="Calibri" pitchFamily="34" charset="-122"/>
                 <a:cs typeface="Calibri" pitchFamily="34" charset="-120"/>
               </a:rPr>
-              <a:t>This matrix is the most elegant thing in the project, and the source of every constraint in it.</a:t>
+              <a:t>This small table is the best idea in our project. Everything else is built around it.</a:t>
             </a:r>
             <a:endParaRPr lang="en-US" sz="1300" dirty="0"/>
           </a:p>
@@ -17794,7 +17817,7 @@
                 <a:ea typeface="Cambria" pitchFamily="34" charset="-122"/>
                 <a:cs typeface="Cambria" pitchFamily="34" charset="-120"/>
               </a:rPr>
-              <a:t>Why this matrix is airtight</a:t>
+              <a:t>Why this table always works</a:t>
             </a:r>
             <a:endParaRPr lang="en-US" sz="3400" dirty="0"/>
           </a:p>
@@ -17833,7 +17856,7 @@
                 <a:ea typeface="Calibri" pitchFamily="34" charset="-122"/>
                 <a:cs typeface="Calibri" pitchFamily="34" charset="-120"/>
               </a:rPr>
-              <a:t>★ The peak of the talk</a:t>
+              <a:t>★ The best moment in the talk</a:t>
             </a:r>
             <a:endParaRPr lang="en-US" sz="1450" dirty="0"/>
           </a:p>
@@ -17941,7 +17964,7 @@
                 <a:ea typeface="Calibri" pitchFamily="34" charset="-122"/>
                 <a:cs typeface="Calibri" pitchFamily="34" charset="-120"/>
               </a:rPr>
-              <a:t>Choose two out of three and</a:t>
+              <a:t>Pick 2 things out of 3.</a:t>
             </a:r>
             <a:endParaRPr lang="en-US" sz="1350" dirty="0"/>
           </a:p>
@@ -17961,7 +17984,7 @@
                 <a:ea typeface="Calibri" pitchFamily="34" charset="-122"/>
                 <a:cs typeface="Calibri" pitchFamily="34" charset="-120"/>
               </a:rPr>
-              <a:t>there are exactly three pairs —</a:t>
+              <a:t>There are only 3 ways to do it.</a:t>
             </a:r>
             <a:endParaRPr lang="en-US" sz="1350" dirty="0"/>
           </a:p>
@@ -17981,7 +18004,7 @@
                 <a:ea typeface="Calibri" pitchFamily="34" charset="-122"/>
                 <a:cs typeface="Calibri" pitchFamily="34" charset="-120"/>
               </a:rPr>
-              <a:t>one for each ghost, one to one</a:t>
+              <a:t>One way for each ghost.</a:t>
             </a:r>
             <a:endParaRPr lang="en-US" sz="1350" dirty="0"/>
           </a:p>
@@ -18150,7 +18173,7 @@
                 <a:ea typeface="Calibri" pitchFamily="34" charset="-122"/>
                 <a:cs typeface="Calibri" pitchFamily="34" charset="-120"/>
               </a:rPr>
-              <a:t>Every kind of evidence is shared by two ghosts, so one rules out only one</a:t>
+              <a:t>Two ghosts share every clue, so one clue only rules out one ghost</a:t>
             </a:r>
             <a:endParaRPr lang="en-US" sz="1200" dirty="0"/>
           </a:p>
@@ -18280,7 +18303,7 @@
                 <a:ea typeface="Calibri" pitchFamily="34" charset="-122"/>
                 <a:cs typeface="Calibri" pitchFamily="34" charset="-120"/>
               </a:rPr>
-              <a:t>Two clues are always decisive</a:t>
+              <a:t>Two clues always give the answer</a:t>
             </a:r>
             <a:endParaRPr lang="en-US" sz="1550" dirty="0"/>
           </a:p>
@@ -18319,7 +18342,7 @@
                 <a:ea typeface="Calibri" pitchFamily="34" charset="-122"/>
                 <a:cs typeface="Calibri" pitchFamily="34" charset="-120"/>
               </a:rPr>
-              <a:t>Pairs map one-to-one onto ghosts. There is no second solution</a:t>
+              <a:t>Each pair belongs to one ghost only. There is no second answer</a:t>
             </a:r>
             <a:endParaRPr lang="en-US" sz="1200" dirty="0"/>
           </a:p>
@@ -18449,7 +18472,7 @@
                 <a:ea typeface="Calibri" pitchFamily="34" charset="-122"/>
                 <a:cs typeface="Calibri" pitchFamily="34" charset="-120"/>
               </a:rPr>
-              <a:t>Elimination works just as well</a:t>
+              <a:t>Ruling things out works too</a:t>
             </a:r>
             <a:endParaRPr lang="en-US" sz="1550" dirty="0"/>
           </a:p>
@@ -18488,7 +18511,7 @@
                 <a:ea typeface="Calibri" pitchFamily="34" charset="-122"/>
                 <a:cs typeface="Calibri" pitchFamily="34" charset="-120"/>
               </a:rPr>
-              <a:t>Proving a kind of evidence absent advances the deduction too</a:t>
+              <a:t>Showing that a clue is NOT there also helps you</a:t>
             </a:r>
             <a:endParaRPr lang="en-US" sz="1200" dirty="0"/>
           </a:p>
@@ -18527,7 +18550,7 @@
                 <a:ea typeface="Cambria" pitchFamily="34" charset="-122"/>
                 <a:cs typeface="Cambria" pitchFamily="34" charset="-120"/>
               </a:rPr>
-              <a:t>No redundancy.    No ambiguity.    No luck.</a:t>
+              <a:t>No guessing.    No luck.    Just logic.</a:t>
             </a:r>
             <a:endParaRPr lang="en-US" sz="3000" dirty="0"/>
           </a:p>
@@ -18566,7 +18589,7 @@
                 <a:ea typeface="Calibri" pitchFamily="34" charset="-122"/>
                 <a:cs typeface="Calibri" pitchFamily="34" charset="-120"/>
               </a:rPr>
-              <a:t>When a player wins a run, they won it by deduction and nothing else.</a:t>
+              <a:t>If a player wins, it is because they worked it out.</a:t>
             </a:r>
             <a:endParaRPr lang="en-US" sz="1400" dirty="0"/>
           </a:p>
@@ -18715,7 +18738,7 @@
                 <a:ea typeface="Cambria" pitchFamily="34" charset="-122"/>
                 <a:cs typeface="Cambria" pitchFamily="34" charset="-120"/>
               </a:rPr>
-              <a:t>Sanity is the pacing engine</a:t>
+              <a:t>Sanity sets the pace</a:t>
             </a:r>
             <a:endParaRPr lang="en-US" sz="3400" dirty="0"/>
           </a:p>
@@ -18754,7 +18777,7 @@
                 <a:ea typeface="Calibri" pitchFamily="34" charset="-122"/>
                 <a:cs typeface="Calibri" pitchFamily="34" charset="-120"/>
               </a:rPr>
-              <a:t>The answer to “why not just take your time?”</a:t>
+              <a:t>This is why you cannot just take your time</a:t>
             </a:r>
             <a:endParaRPr lang="en-US" sz="1450" dirty="0"/>
           </a:p>
@@ -18820,7 +18843,7 @@
                 <a:ea typeface="Calibri" pitchFamily="34" charset="-122"/>
                 <a:cs typeface="Calibri" pitchFamily="34" charset="-120"/>
               </a:rPr>
-              <a:t>How sanity moves</a:t>
+              <a:t>How sanity changes</a:t>
             </a:r>
             <a:endParaRPr lang="en-US" sz="1600" dirty="0"/>
           </a:p>
@@ -18859,7 +18882,7 @@
                 <a:ea typeface="Calibri" pitchFamily="34" charset="-122"/>
                 <a:cs typeface="Calibri" pitchFamily="34" charset="-120"/>
               </a:rPr>
-              <a:t>Starting value</a:t>
+              <a:t>You start at</a:t>
             </a:r>
             <a:endParaRPr lang="en-US" sz="1350" dirty="0"/>
           </a:p>
@@ -18937,7 +18960,7 @@
                 <a:ea typeface="Calibri" pitchFamily="34" charset="-122"/>
                 <a:cs typeface="Calibri" pitchFamily="34" charset="-120"/>
               </a:rPr>
-              <a:t>Standing in darkness</a:t>
+              <a:t>Standing in the dark</a:t>
             </a:r>
             <a:endParaRPr lang="en-US" sz="1350" dirty="0"/>
           </a:p>
@@ -19015,7 +19038,7 @@
                 <a:ea typeface="Calibri" pitchFamily="34" charset="-122"/>
                 <a:cs typeface="Calibri" pitchFamily="34" charset="-120"/>
               </a:rPr>
-              <a:t>In a lit room</a:t>
+              <a:t>In a room with the light on</a:t>
             </a:r>
             <a:endParaRPr lang="en-US" sz="1350" dirty="0"/>
           </a:p>
@@ -19132,7 +19155,7 @@
                 <a:ea typeface="Courier New" pitchFamily="34" charset="-122"/>
                 <a:cs typeface="Courier New" pitchFamily="34" charset="-120"/>
               </a:rPr>
-              <a:t>rate × 0.5</a:t>
+              <a:t>half as fast</a:t>
             </a:r>
             <a:endParaRPr lang="en-US" sz="1200" dirty="0"/>
           </a:p>
@@ -19171,7 +19194,7 @@
                 <a:ea typeface="Calibri" pitchFamily="34" charset="-122"/>
                 <a:cs typeface="Calibri" pitchFamily="34" charset="-120"/>
               </a:rPr>
-              <a:t>Witnessing a ghost event</a:t>
+              <a:t>Seeing the ghost do something</a:t>
             </a:r>
             <a:endParaRPr lang="en-US" sz="1350" dirty="0"/>
           </a:p>
@@ -19210,7 +19233,7 @@
                 <a:ea typeface="Courier New" pitchFamily="34" charset="-122"/>
                 <a:cs typeface="Courier New" pitchFamily="34" charset="-120"/>
               </a:rPr>
-              <a:t>−15 % once</a:t>
+              <a:t>−15 % at once</a:t>
             </a:r>
             <a:endParaRPr lang="en-US" sz="1200" dirty="0"/>
           </a:p>
@@ -19249,7 +19272,7 @@
                 <a:ea typeface="Calibri" pitchFamily="34" charset="-122"/>
                 <a:cs typeface="Calibri" pitchFamily="34" charset="-120"/>
               </a:rPr>
-              <a:t>While being hunted</a:t>
+              <a:t>While it is hunting you</a:t>
             </a:r>
             <a:endParaRPr lang="en-US" sz="1350" dirty="0"/>
           </a:p>
@@ -19327,7 +19350,7 @@
                 <a:ea typeface="Calibri" pitchFamily="34" charset="-122"/>
                 <a:cs typeface="Calibri" pitchFamily="34" charset="-120"/>
               </a:rPr>
-              <a:t>Back in the entrance safe zone</a:t>
+              <a:t>Back in the lobby</a:t>
             </a:r>
             <a:endParaRPr lang="en-US" sz="1350" dirty="0"/>
           </a:p>
@@ -19432,7 +19455,7 @@
                 <a:ea typeface="Calibri" pitchFamily="34" charset="-122"/>
                 <a:cs typeface="Calibri" pitchFamily="34" charset="-120"/>
               </a:rPr>
-              <a:t>Hunt probability</a:t>
+              <a:t>Chance of a hunt</a:t>
             </a:r>
             <a:endParaRPr lang="en-US" sz="1500" dirty="0"/>
           </a:p>
@@ -19510,7 +19533,7 @@
                 <a:ea typeface="Calibri" pitchFamily="34" charset="-122"/>
                 <a:cs typeface="Calibri" pitchFamily="34" charset="-120"/>
               </a:rPr>
-              <a:t>Rolled once every 25 seconds, once sanity drops below 50 %</a:t>
+              <a:t>The game checks every 25 seconds, once sanity is under 50 %</a:t>
             </a:r>
             <a:endParaRPr lang="en-US" sz="1250" dirty="0"/>
           </a:p>
@@ -19825,7 +19848,7 @@
                 <a:ea typeface="Calibri" pitchFamily="34" charset="-122"/>
                 <a:cs typeface="Calibri" pitchFamily="34" charset="-120"/>
               </a:rPr>
-              <a:t>→   certain</a:t>
+              <a:t>→   always</a:t>
             </a:r>
             <a:endParaRPr lang="en-US" sz="1400" dirty="0"/>
           </a:p>
@@ -19864,7 +19887,7 @@
                 <a:ea typeface="Calibri" pitchFamily="34" charset="-122"/>
                 <a:cs typeface="Calibri" pitchFamily="34" charset="-120"/>
               </a:rPr>
-              <a:t>Design intent: the player is permanently doing the arithmetic on how much longer they can stay. That anxiety is the gameplay.</a:t>
+              <a:t>The player is always asking the same question: how much longer can I stay? That worry is the game.</a:t>
             </a:r>
             <a:endParaRPr lang="en-US" sz="1300" dirty="0"/>
           </a:p>
@@ -20013,7 +20036,7 @@
                 <a:ea typeface="Cambria" pitchFamily="34" charset="-122"/>
                 <a:cs typeface="Cambria" pitchFamily="34" charset="-120"/>
               </a:rPr>
-              <a:t>Running is not the answer</a:t>
+              <a:t>Running away does not work</a:t>
             </a:r>
             <a:endParaRPr lang="en-US" sz="3400" dirty="0"/>
           </a:p>
@@ -20052,7 +20075,7 @@
                 <a:ea typeface="Calibri" pitchFamily="34" charset="-122"/>
                 <a:cs typeface="Calibri" pitchFamily="34" charset="-120"/>
               </a:rPr>
-              <a:t>These numbers were re-tuned by hand, not guessed</a:t>
+              <a:t>We set these speeds by hand and tested them</a:t>
             </a:r>
             <a:endParaRPr lang="en-US" sz="1450" dirty="0"/>
           </a:p>
@@ -20134,7 +20157,7 @@
                 <a:ea typeface="Calibri" pitchFamily="34" charset="-122"/>
                 <a:cs typeface="Calibri" pitchFamily="34" charset="-120"/>
               </a:rPr>
-              <a:t>No adrenaline bonus</a:t>
+              <a:t>No speed boost in a hunt</a:t>
             </a:r>
             <a:endParaRPr lang="en-US" sz="1400" dirty="0"/>
           </a:p>
@@ -20173,7 +20196,7 @@
                 <a:ea typeface="Calibri" pitchFamily="34" charset="-122"/>
                 <a:cs typeface="Calibri" pitchFamily="34" charset="-120"/>
               </a:rPr>
-              <a:t>A hunt sprint is 3.5, same as any other sprint. No free crutch.</a:t>
+              <a:t>Sprinting is 3.5, the same as normal. We give you no free help.</a:t>
             </a:r>
             <a:endParaRPr lang="en-US" sz="1150" dirty="0"/>
           </a:p>
@@ -20278,7 +20301,7 @@
                 <a:ea typeface="Calibri" pitchFamily="34" charset="-122"/>
                 <a:cs typeface="Calibri" pitchFamily="34" charset="-120"/>
               </a:rPr>
-              <a:t>Spirit 3.3 and Wraith 3.4 you can just outrun. 3.6 you cannot.</a:t>
+              <a:t>You can just outrun 3.3 and 3.4. You cannot outrun 3.6.</a:t>
             </a:r>
             <a:endParaRPr lang="en-US" sz="1150" dirty="0"/>
           </a:p>
@@ -20344,7 +20367,7 @@
                 <a:ea typeface="Calibri" pitchFamily="34" charset="-122"/>
                 <a:cs typeface="Calibri" pitchFamily="34" charset="-120"/>
               </a:rPr>
-              <a:t>Stamina lasts 4.2 seconds</a:t>
+              <a:t>You can only sprint 4.2 seconds</a:t>
             </a:r>
             <a:endParaRPr lang="en-US" sz="1400" dirty="0"/>
           </a:p>
@@ -20383,7 +20406,7 @@
                 <a:ea typeface="Calibri" pitchFamily="34" charset="-122"/>
                 <a:cs typeface="Calibri" pitchFamily="34" charset="-120"/>
               </a:rPr>
-              <a:t>Then 3.5 seconds to refill, and you are back to walking at 2.0.</a:t>
+              <a:t>Then 3.5 seconds to get it back, and you walk at 2.0.</a:t>
             </a:r>
             <a:endParaRPr lang="en-US" sz="1150" dirty="0"/>
           </a:p>
@@ -20449,7 +20472,7 @@
                 <a:ea typeface="Calibri" pitchFamily="34" charset="-122"/>
                 <a:cs typeface="Calibri" pitchFamily="34" charset="-120"/>
               </a:rPr>
-              <a:t>Break the line of sight</a:t>
+              <a:t>Get out of its sight instead</a:t>
             </a:r>
             <a:endParaRPr lang="en-US" sz="1400" dirty="0"/>
           </a:p>
@@ -20488,7 +20511,7 @@
                 <a:ea typeface="Calibri" pitchFamily="34" charset="-122"/>
                 <a:cs typeface="Calibri" pitchFamily="34" charset="-120"/>
               </a:rPr>
-              <a:t>Lose it and the ghost only searches your last known position. Turn a corner. Shut the door.</a:t>
+              <a:t>If it cannot see you, it only checks where you were. Turn a corner. Close the door.</a:t>
             </a:r>
             <a:endParaRPr lang="en-US" sz="1150" dirty="0"/>
           </a:p>
@@ -20559,7 +20582,7 @@
                 <a:ea typeface="Courier New" pitchFamily="34" charset="-122"/>
                 <a:cs typeface="Courier New" pitchFamily="34" charset="-120"/>
               </a:rPr>
-              <a:t>FILE 08 — INSTRUMENTS</a:t>
+              <a:t>FILE 08 — TOOLS</a:t>
             </a:r>
             <a:endParaRPr lang="en-US" sz="1050" dirty="0"/>
           </a:p>
@@ -20637,7 +20660,7 @@
                 <a:ea typeface="Cambria" pitchFamily="34" charset="-122"/>
                 <a:cs typeface="Cambria" pitchFamily="34" charset="-120"/>
               </a:rPr>
-              <a:t>Three instruments, three different fears</a:t>
+              <a:t>Three tools, three kinds of fear</a:t>
             </a:r>
             <a:endParaRPr lang="en-US" sz="3400" dirty="0"/>
           </a:p>
@@ -20676,7 +20699,7 @@
                 <a:ea typeface="Calibri" pitchFamily="34" charset="-122"/>
                 <a:cs typeface="Calibri" pitchFamily="34" charset="-120"/>
               </a:rPr>
-              <a:t>They are not three ways of getting the same thing</a:t>
+              <a:t>They are not just three ways to get the same thing</a:t>
             </a:r>
             <a:endParaRPr lang="en-US" sz="1450" dirty="0"/>
           </a:p>
@@ -20742,7 +20765,7 @@
                 <a:ea typeface="Courier New" pitchFamily="34" charset="-122"/>
                 <a:cs typeface="Courier New" pitchFamily="34" charset="-120"/>
               </a:rPr>
-              <a:t>T R A C K</a:t>
+              <a:t>F O L L O W</a:t>
             </a:r>
             <a:endParaRPr lang="en-US" sz="1250" dirty="0"/>
           </a:p>
@@ -20823,7 +20846,7 @@
                 <a:ea typeface="Calibri" pitchFamily="34" charset="-122"/>
                 <a:cs typeface="Calibri" pitchFamily="34" charset="-120"/>
               </a:rPr>
-              <a:t>You follow the reading. Higher means closer to where it just was.</a:t>
+              <a:t>You follow the number. A higher number means it was just here.</a:t>
             </a:r>
             <a:endParaRPr lang="en-US" sz="1350" dirty="0"/>
           </a:p>
@@ -21009,7 +21032,7 @@
                 <a:ea typeface="Calibri" pitchFamily="34" charset="-122"/>
                 <a:cs typeface="Calibri" pitchFamily="34" charset="-120"/>
               </a:rPr>
-              <a:t>You stand still and sweep handles and switches. Your flashlight is forced off.</a:t>
+              <a:t>You stand still and check door handles and switches. Your flashlight turns off.</a:t>
             </a:r>
             <a:endParaRPr lang="en-US" sz="1350" dirty="0"/>
           </a:p>
@@ -21195,7 +21218,7 @@
                 <a:ea typeface="Calibri" pitchFamily="34" charset="-122"/>
                 <a:cs typeface="Calibri" pitchFamily="34" charset="-120"/>
               </a:rPr>
-              <a:t>You set it down in the ghost room, leave, and have to come back to read it.</a:t>
+              <a:t>You put it down, walk away, and have to go back in to read it.</a:t>
             </a:r>
             <a:endParaRPr lang="en-US" sz="1350" dirty="0"/>
           </a:p>
@@ -21300,7 +21323,7 @@
                 <a:ea typeface="Calibri" pitchFamily="34" charset="-122"/>
                 <a:cs typeface="Calibri" pitchFamily="34" charset="-120"/>
               </a:rPr>
-              <a:t>Only three equipment slots, and the flashlight permanently occupies one. Every run forces a trade. That pressure is deliberate.</a:t>
+              <a:t>You only get 3 tool slots, and the flashlight always takes one of them. So you have to choose. We did that on purpose.</a:t>
             </a:r>
             <a:endParaRPr lang="en-US" sz="1550" dirty="0"/>
           </a:p>
@@ -21488,7 +21511,7 @@
                 <a:ea typeface="Calibri" pitchFamily="34" charset="-122"/>
                 <a:cs typeface="Calibri" pitchFamily="34" charset="-120"/>
               </a:rPr>
-              <a:t>Every difference is expressed as data, not as a subclass</a:t>
+              <a:t>The differences live in data files, not in three sets of code</a:t>
             </a:r>
             <a:endParaRPr lang="en-US" sz="1450" dirty="0"/>
           </a:p>
@@ -21593,7 +21616,7 @@
                 <a:ea typeface="Calibri" pitchFamily="34" charset="-122"/>
                 <a:cs typeface="Calibri" pitchFamily="34" charset="-120"/>
               </a:rPr>
-              <a:t>Slow · stubborn</a:t>
+              <a:t>Slow and stubborn</a:t>
             </a:r>
             <a:endParaRPr lang="en-US" sz="1350" dirty="0"/>
           </a:p>
@@ -21636,7 +21659,7 @@
                 <a:ea typeface="Calibri" pitchFamily="34" charset="-122"/>
                 <a:cs typeface="Calibri" pitchFamily="34" charset="-120"/>
               </a:rPr>
-              <a:t>Lingers in the ghost room</a:t>
+              <a:t>Stays in its own room</a:t>
             </a:r>
             <a:endParaRPr lang="en-US" sz="1300" dirty="0"/>
           </a:p>
@@ -21657,7 +21680,7 @@
                 <a:ea typeface="Calibri" pitchFamily="34" charset="-122"/>
                 <a:cs typeface="Calibri" pitchFamily="34" charset="-120"/>
               </a:rPr>
-              <a:t>Heavy, distinct footsteps</a:t>
+              <a:t>Loud, clear footsteps</a:t>
             </a:r>
             <a:endParaRPr lang="en-US" sz="1300" dirty="0"/>
           </a:p>
@@ -21678,7 +21701,7 @@
                 <a:ea typeface="Calibri" pitchFamily="34" charset="-122"/>
                 <a:cs typeface="Calibri" pitchFamily="34" charset="-120"/>
               </a:rPr>
-              <a:t>Longest hunt duration</a:t>
+              <a:t>Hunts for the longest</a:t>
             </a:r>
             <a:endParaRPr lang="en-US" sz="1300" dirty="0"/>
           </a:p>
@@ -21717,7 +21740,7 @@
                 <a:ea typeface="Courier New" pitchFamily="34" charset="-122"/>
                 <a:cs typeface="Courier New" pitchFamily="34" charset="-120"/>
               </a:rPr>
-              <a:t>Hunt 3.3 m/s</a:t>
+              <a:t>Hunts at 3.3 m/s</a:t>
             </a:r>
             <a:endParaRPr lang="en-US" sz="1300" dirty="0"/>
           </a:p>
@@ -21822,7 +21845,7 @@
                 <a:ea typeface="Calibri" pitchFamily="34" charset="-122"/>
                 <a:cs typeface="Calibri" pitchFamily="34" charset="-120"/>
               </a:rPr>
-              <a:t>Drifting · traceless</a:t>
+              <a:t>Quiet and hard to follow</a:t>
             </a:r>
             <a:endParaRPr lang="en-US" sz="1350" dirty="0"/>
           </a:p>
@@ -21865,7 +21888,7 @@
                 <a:ea typeface="Calibri" pitchFamily="34" charset="-122"/>
                 <a:cs typeface="Calibri" pitchFamily="34" charset="-120"/>
               </a:rPr>
-              <a:t>Leaves no floor prints</a:t>
+              <a:t>Leaves no footprints</a:t>
             </a:r>
             <a:endParaRPr lang="en-US" sz="1300" dirty="0"/>
           </a:p>
@@ -21886,7 +21909,7 @@
                 <a:ea typeface="Calibri" pitchFamily="34" charset="-122"/>
                 <a:cs typeface="Calibri" pitchFamily="34" charset="-120"/>
               </a:rPr>
-              <a:t>Blinks short distances closer</a:t>
+              <a:t>Jumps a short way closer</a:t>
             </a:r>
             <a:endParaRPr lang="en-US" sz="1300" dirty="0"/>
           </a:p>
@@ -21907,7 +21930,7 @@
                 <a:ea typeface="Calibri" pitchFamily="34" charset="-122"/>
                 <a:cs typeface="Calibri" pitchFamily="34" charset="-120"/>
               </a:rPr>
-              <a:t>Periodic bursts while chasing</a:t>
+              <a:t>Speeds up while chasing</a:t>
             </a:r>
             <a:endParaRPr lang="en-US" sz="1300" dirty="0"/>
           </a:p>
@@ -21946,7 +21969,7 @@
                 <a:ea typeface="Courier New" pitchFamily="34" charset="-122"/>
                 <a:cs typeface="Courier New" pitchFamily="34" charset="-120"/>
               </a:rPr>
-              <a:t>Hunt 3.4 m/s</a:t>
+              <a:t>Hunts at 3.4 m/s</a:t>
             </a:r>
             <a:endParaRPr lang="en-US" sz="1300" dirty="0"/>
           </a:p>
@@ -22051,7 +22074,7 @@
                 <a:ea typeface="Calibri" pitchFamily="34" charset="-122"/>
                 <a:cs typeface="Calibri" pitchFamily="34" charset="-120"/>
               </a:rPr>
-              <a:t>Violent · destructive</a:t>
+              <a:t>Angry and loud</a:t>
             </a:r>
             <a:endParaRPr lang="en-US" sz="1350" dirty="0"/>
           </a:p>
@@ -22094,7 +22117,7 @@
                 <a:ea typeface="Calibri" pitchFamily="34" charset="-122"/>
                 <a:cs typeface="Calibri" pitchFamily="34" charset="-120"/>
               </a:rPr>
-              <a:t>Throws interactable objects</a:t>
+              <a:t>Throws things around</a:t>
             </a:r>
             <a:endParaRPr lang="en-US" sz="1300" dirty="0"/>
           </a:p>
@@ -22115,7 +22138,7 @@
                 <a:ea typeface="Calibri" pitchFamily="34" charset="-122"/>
                 <a:cs typeface="Calibri" pitchFamily="34" charset="-120"/>
               </a:rPr>
-              <a:t>Flings everything at hunt start</a:t>
+              <a:t>Throws everything at hunt start</a:t>
             </a:r>
             <a:endParaRPr lang="en-US" sz="1300" dirty="0"/>
           </a:p>
@@ -22175,7 +22198,7 @@
                 <a:ea typeface="Courier New" pitchFamily="34" charset="-122"/>
                 <a:cs typeface="Courier New" pitchFamily="34" charset="-120"/>
               </a:rPr>
-              <a:t>Hunt 3.6 m/s</a:t>
+              <a:t>Hunts at 3.6 m/s</a:t>
             </a:r>
             <a:endParaRPr lang="en-US" sz="1300" dirty="0"/>
           </a:p>
@@ -22241,7 +22264,7 @@
                 <a:ea typeface="Calibri" pitchFamily="34" charset="-122"/>
                 <a:cs typeface="Calibri" pitchFamily="34" charset="-120"/>
               </a:rPr>
-              <a:t>Three ghosts  =  one GhostAI  +  three ScriptableObject data assets</a:t>
+              <a:t>Three ghosts  =  one GhostAI script  +  three data files</a:t>
             </a:r>
             <a:endParaRPr lang="en-US" sz="1800" dirty="0"/>
           </a:p>
@@ -22280,7 +22303,7 @@
                 <a:ea typeface="Calibri" pitchFamily="34" charset="-122"/>
                 <a:cs typeface="Calibri" pitchFamily="34" charset="-120"/>
               </a:rPr>
-              <a:t>Adding a fourth ghost means authoring one asset file — not one line of code changes.</a:t>
+              <a:t>To add a fourth ghost we make one more data file. We do not change any code.</a:t>
             </a:r>
             <a:endParaRPr lang="en-US" sz="1300" dirty="0"/>
           </a:p>
